--- a/public/fun/pack/pptx/birthday/돌잔치_07_돌잡이중심_뒷산진달래.pptx
+++ b/public/fun/pack/pptx/birthday/돌잔치_07_돌잡이중심_뒷산진달래.pptx
@@ -3347,7 +3347,7 @@
             <a:r>
               <a:rPr sz="4000" b="1" i="0">
                 <a:solidFill>
-                  <a:srgbClr val="71285B"/>
+                  <a:srgbClr val="721D59"/>
                 </a:solidFill>
               </a:rPr>
               <a:t>첫 번째 생일</a:t>
@@ -3385,7 +3385,7 @@
             <a:r>
               <a:rPr sz="1700" b="0" i="1">
                 <a:solidFill>
-                  <a:srgbClr val="71285B"/>
+                  <a:srgbClr val="721D59"/>
                 </a:solidFill>
               </a:rPr>
               <a:t>돌상 앞에서 한참 고민하던 아기</a:t>
@@ -3487,7 +3487,7 @@
             <a:avLst/>
           </a:prstGeom>
           <a:solidFill>
-            <a:srgbClr val="F1D0E7"/>
+            <a:srgbClr val="F7D4ED"/>
           </a:solidFill>
           <a:ln>
             <a:noFill/>
@@ -3516,7 +3516,7 @@
             <a:avLst/>
           </a:prstGeom>
           <a:solidFill>
-            <a:srgbClr val="BD4298"/>
+            <a:srgbClr val="D345A9"/>
           </a:solidFill>
           <a:ln>
             <a:noFill/>
@@ -3560,7 +3560,7 @@
             <a:r>
               <a:rPr sz="3000" b="1" i="0">
                 <a:solidFill>
-                  <a:srgbClr val="71285B"/>
+                  <a:srgbClr val="721D59"/>
                 </a:solidFill>
               </a:rPr>
               <a:t>우리 아기를 소개합니다</a:t>
@@ -3585,11 +3585,11 @@
             </a:avLst>
           </a:prstGeom>
           <a:solidFill>
-            <a:srgbClr val="F1D0E7"/>
+            <a:srgbClr val="F7D4ED"/>
           </a:solidFill>
           <a:ln w="19050">
             <a:solidFill>
-              <a:srgbClr val="BD4298"/>
+              <a:srgbClr val="D345A9"/>
             </a:solidFill>
             <a:prstDash val="dash"/>
           </a:ln>
@@ -3608,7 +3608,7 @@
             <a:r>
               <a:rPr sz="1400" b="0" i="0">
                 <a:solidFill>
-                  <a:srgbClr val="71285B"/>
+                  <a:srgbClr val="721D59"/>
                 </a:solidFill>
               </a:rPr>
               <a:t>아기 사진을 넣어 주세요</a:t>
@@ -3648,7 +3648,7 @@
                       <a:r>
                         <a:rPr sz="1500" b="1">
                           <a:solidFill>
-                            <a:srgbClr val="71285B"/>
+                            <a:srgbClr val="721D59"/>
                           </a:solidFill>
                         </a:rPr>
                         <a:t>이름</a:t>
@@ -3658,30 +3658,30 @@
                   <a:tcPr anchor="ctr" marL="73152" marR="73152">
                     <a:lnL w="9525" cap="flat" cmpd="sng" algn="ctr">
                       <a:solidFill>
-                        <a:srgbClr val="F1D0E7"/>
+                        <a:srgbClr val="F7D4ED"/>
                       </a:solidFill>
                       <a:prstDash val="solid"/>
                     </a:lnL>
                     <a:lnR w="9525" cap="flat" cmpd="sng" algn="ctr">
                       <a:solidFill>
-                        <a:srgbClr val="F1D0E7"/>
+                        <a:srgbClr val="F7D4ED"/>
                       </a:solidFill>
                       <a:prstDash val="solid"/>
                     </a:lnR>
                     <a:lnT w="9525" cap="flat" cmpd="sng" algn="ctr">
                       <a:solidFill>
-                        <a:srgbClr val="F1D0E7"/>
+                        <a:srgbClr val="F7D4ED"/>
                       </a:solidFill>
                       <a:prstDash val="solid"/>
                     </a:lnT>
                     <a:lnB w="9525" cap="flat" cmpd="sng" algn="ctr">
                       <a:solidFill>
-                        <a:srgbClr val="F1D0E7"/>
+                        <a:srgbClr val="F7D4ED"/>
                       </a:solidFill>
                       <a:prstDash val="solid"/>
                     </a:lnB>
                     <a:solidFill>
-                      <a:srgbClr val="F1D0E7"/>
+                      <a:srgbClr val="F7D4ED"/>
                     </a:solidFill>
                   </a:tcPr>
                 </a:tc>
@@ -3704,30 +3704,30 @@
                   <a:tcPr anchor="ctr" marL="73152" marR="73152">
                     <a:lnL w="9525" cap="flat" cmpd="sng" algn="ctr">
                       <a:solidFill>
-                        <a:srgbClr val="F1D0E7"/>
+                        <a:srgbClr val="F7D4ED"/>
                       </a:solidFill>
                       <a:prstDash val="solid"/>
                     </a:lnL>
                     <a:lnR w="9525" cap="flat" cmpd="sng" algn="ctr">
                       <a:solidFill>
-                        <a:srgbClr val="F1D0E7"/>
+                        <a:srgbClr val="F7D4ED"/>
                       </a:solidFill>
                       <a:prstDash val="solid"/>
                     </a:lnR>
                     <a:lnT w="9525" cap="flat" cmpd="sng" algn="ctr">
                       <a:solidFill>
-                        <a:srgbClr val="F1D0E7"/>
+                        <a:srgbClr val="F7D4ED"/>
                       </a:solidFill>
                       <a:prstDash val="solid"/>
                     </a:lnT>
                     <a:lnB w="9525" cap="flat" cmpd="sng" algn="ctr">
                       <a:solidFill>
-                        <a:srgbClr val="F1D0E7"/>
+                        <a:srgbClr val="F7D4ED"/>
                       </a:solidFill>
                       <a:prstDash val="solid"/>
                     </a:lnB>
                     <a:solidFill>
-                      <a:srgbClr val="FAF0F7"/>
+                      <a:srgbClr val="FCF3F9"/>
                     </a:solidFill>
                   </a:tcPr>
                 </a:tc>
@@ -3742,7 +3742,7 @@
                       <a:r>
                         <a:rPr sz="1500" b="1">
                           <a:solidFill>
-                            <a:srgbClr val="71285B"/>
+                            <a:srgbClr val="721D59"/>
                           </a:solidFill>
                         </a:rPr>
                         <a:t>생일</a:t>
@@ -3752,30 +3752,30 @@
                   <a:tcPr anchor="ctr" marL="73152" marR="73152">
                     <a:lnL w="9525" cap="flat" cmpd="sng" algn="ctr">
                       <a:solidFill>
-                        <a:srgbClr val="F1D0E7"/>
+                        <a:srgbClr val="F7D4ED"/>
                       </a:solidFill>
                       <a:prstDash val="solid"/>
                     </a:lnL>
                     <a:lnR w="9525" cap="flat" cmpd="sng" algn="ctr">
                       <a:solidFill>
-                        <a:srgbClr val="F1D0E7"/>
+                        <a:srgbClr val="F7D4ED"/>
                       </a:solidFill>
                       <a:prstDash val="solid"/>
                     </a:lnR>
                     <a:lnT w="9525" cap="flat" cmpd="sng" algn="ctr">
                       <a:solidFill>
-                        <a:srgbClr val="F1D0E7"/>
+                        <a:srgbClr val="F7D4ED"/>
                       </a:solidFill>
                       <a:prstDash val="solid"/>
                     </a:lnT>
                     <a:lnB w="9525" cap="flat" cmpd="sng" algn="ctr">
                       <a:solidFill>
-                        <a:srgbClr val="F1D0E7"/>
+                        <a:srgbClr val="F7D4ED"/>
                       </a:solidFill>
                       <a:prstDash val="solid"/>
                     </a:lnB>
                     <a:solidFill>
-                      <a:srgbClr val="F1D0E7"/>
+                      <a:srgbClr val="F7D4ED"/>
                     </a:solidFill>
                   </a:tcPr>
                 </a:tc>
@@ -3798,25 +3798,25 @@
                   <a:tcPr anchor="ctr" marL="73152" marR="73152">
                     <a:lnL w="9525" cap="flat" cmpd="sng" algn="ctr">
                       <a:solidFill>
-                        <a:srgbClr val="F1D0E7"/>
+                        <a:srgbClr val="F7D4ED"/>
                       </a:solidFill>
                       <a:prstDash val="solid"/>
                     </a:lnL>
                     <a:lnR w="9525" cap="flat" cmpd="sng" algn="ctr">
                       <a:solidFill>
-                        <a:srgbClr val="F1D0E7"/>
+                        <a:srgbClr val="F7D4ED"/>
                       </a:solidFill>
                       <a:prstDash val="solid"/>
                     </a:lnR>
                     <a:lnT w="9525" cap="flat" cmpd="sng" algn="ctr">
                       <a:solidFill>
-                        <a:srgbClr val="F1D0E7"/>
+                        <a:srgbClr val="F7D4ED"/>
                       </a:solidFill>
                       <a:prstDash val="solid"/>
                     </a:lnT>
                     <a:lnB w="9525" cap="flat" cmpd="sng" algn="ctr">
                       <a:solidFill>
-                        <a:srgbClr val="F1D0E7"/>
+                        <a:srgbClr val="F7D4ED"/>
                       </a:solidFill>
                       <a:prstDash val="solid"/>
                     </a:lnB>
@@ -3836,7 +3836,7 @@
                       <a:r>
                         <a:rPr sz="1500" b="1">
                           <a:solidFill>
-                            <a:srgbClr val="71285B"/>
+                            <a:srgbClr val="721D59"/>
                           </a:solidFill>
                         </a:rPr>
                         <a:t>키 · 몸무게</a:t>
@@ -3846,30 +3846,30 @@
                   <a:tcPr anchor="ctr" marL="73152" marR="73152">
                     <a:lnL w="9525" cap="flat" cmpd="sng" algn="ctr">
                       <a:solidFill>
-                        <a:srgbClr val="F1D0E7"/>
+                        <a:srgbClr val="F7D4ED"/>
                       </a:solidFill>
                       <a:prstDash val="solid"/>
                     </a:lnL>
                     <a:lnR w="9525" cap="flat" cmpd="sng" algn="ctr">
                       <a:solidFill>
-                        <a:srgbClr val="F1D0E7"/>
+                        <a:srgbClr val="F7D4ED"/>
                       </a:solidFill>
                       <a:prstDash val="solid"/>
                     </a:lnR>
                     <a:lnT w="9525" cap="flat" cmpd="sng" algn="ctr">
                       <a:solidFill>
-                        <a:srgbClr val="F1D0E7"/>
+                        <a:srgbClr val="F7D4ED"/>
                       </a:solidFill>
                       <a:prstDash val="solid"/>
                     </a:lnT>
                     <a:lnB w="9525" cap="flat" cmpd="sng" algn="ctr">
                       <a:solidFill>
-                        <a:srgbClr val="F1D0E7"/>
+                        <a:srgbClr val="F7D4ED"/>
                       </a:solidFill>
                       <a:prstDash val="solid"/>
                     </a:lnB>
                     <a:solidFill>
-                      <a:srgbClr val="F1D0E7"/>
+                      <a:srgbClr val="F7D4ED"/>
                     </a:solidFill>
                   </a:tcPr>
                 </a:tc>
@@ -3892,30 +3892,30 @@
                   <a:tcPr anchor="ctr" marL="73152" marR="73152">
                     <a:lnL w="9525" cap="flat" cmpd="sng" algn="ctr">
                       <a:solidFill>
-                        <a:srgbClr val="F1D0E7"/>
+                        <a:srgbClr val="F7D4ED"/>
                       </a:solidFill>
                       <a:prstDash val="solid"/>
                     </a:lnL>
                     <a:lnR w="9525" cap="flat" cmpd="sng" algn="ctr">
                       <a:solidFill>
-                        <a:srgbClr val="F1D0E7"/>
+                        <a:srgbClr val="F7D4ED"/>
                       </a:solidFill>
                       <a:prstDash val="solid"/>
                     </a:lnR>
                     <a:lnT w="9525" cap="flat" cmpd="sng" algn="ctr">
                       <a:solidFill>
-                        <a:srgbClr val="F1D0E7"/>
+                        <a:srgbClr val="F7D4ED"/>
                       </a:solidFill>
                       <a:prstDash val="solid"/>
                     </a:lnT>
                     <a:lnB w="9525" cap="flat" cmpd="sng" algn="ctr">
                       <a:solidFill>
-                        <a:srgbClr val="F1D0E7"/>
+                        <a:srgbClr val="F7D4ED"/>
                       </a:solidFill>
                       <a:prstDash val="solid"/>
                     </a:lnB>
                     <a:solidFill>
-                      <a:srgbClr val="FAF0F7"/>
+                      <a:srgbClr val="FCF3F9"/>
                     </a:solidFill>
                   </a:tcPr>
                 </a:tc>
@@ -3930,7 +3930,7 @@
                       <a:r>
                         <a:rPr sz="1500" b="1">
                           <a:solidFill>
-                            <a:srgbClr val="71285B"/>
+                            <a:srgbClr val="721D59"/>
                           </a:solidFill>
                         </a:rPr>
                         <a:t>좋아하는 것</a:t>
@@ -3940,30 +3940,30 @@
                   <a:tcPr anchor="ctr" marL="73152" marR="73152">
                     <a:lnL w="9525" cap="flat" cmpd="sng" algn="ctr">
                       <a:solidFill>
-                        <a:srgbClr val="F1D0E7"/>
+                        <a:srgbClr val="F7D4ED"/>
                       </a:solidFill>
                       <a:prstDash val="solid"/>
                     </a:lnL>
                     <a:lnR w="9525" cap="flat" cmpd="sng" algn="ctr">
                       <a:solidFill>
-                        <a:srgbClr val="F1D0E7"/>
+                        <a:srgbClr val="F7D4ED"/>
                       </a:solidFill>
                       <a:prstDash val="solid"/>
                     </a:lnR>
                     <a:lnT w="9525" cap="flat" cmpd="sng" algn="ctr">
                       <a:solidFill>
-                        <a:srgbClr val="F1D0E7"/>
+                        <a:srgbClr val="F7D4ED"/>
                       </a:solidFill>
                       <a:prstDash val="solid"/>
                     </a:lnT>
                     <a:lnB w="9525" cap="flat" cmpd="sng" algn="ctr">
                       <a:solidFill>
-                        <a:srgbClr val="F1D0E7"/>
+                        <a:srgbClr val="F7D4ED"/>
                       </a:solidFill>
                       <a:prstDash val="solid"/>
                     </a:lnB>
                     <a:solidFill>
-                      <a:srgbClr val="F1D0E7"/>
+                      <a:srgbClr val="F7D4ED"/>
                     </a:solidFill>
                   </a:tcPr>
                 </a:tc>
@@ -3986,25 +3986,25 @@
                   <a:tcPr anchor="ctr" marL="73152" marR="73152">
                     <a:lnL w="9525" cap="flat" cmpd="sng" algn="ctr">
                       <a:solidFill>
-                        <a:srgbClr val="F1D0E7"/>
+                        <a:srgbClr val="F7D4ED"/>
                       </a:solidFill>
                       <a:prstDash val="solid"/>
                     </a:lnL>
                     <a:lnR w="9525" cap="flat" cmpd="sng" algn="ctr">
                       <a:solidFill>
-                        <a:srgbClr val="F1D0E7"/>
+                        <a:srgbClr val="F7D4ED"/>
                       </a:solidFill>
                       <a:prstDash val="solid"/>
                     </a:lnR>
                     <a:lnT w="9525" cap="flat" cmpd="sng" algn="ctr">
                       <a:solidFill>
-                        <a:srgbClr val="F1D0E7"/>
+                        <a:srgbClr val="F7D4ED"/>
                       </a:solidFill>
                       <a:prstDash val="solid"/>
                     </a:lnT>
                     <a:lnB w="9525" cap="flat" cmpd="sng" algn="ctr">
                       <a:solidFill>
-                        <a:srgbClr val="F1D0E7"/>
+                        <a:srgbClr val="F7D4ED"/>
                       </a:solidFill>
                       <a:prstDash val="solid"/>
                     </a:lnB>
@@ -4024,7 +4024,7 @@
                       <a:r>
                         <a:rPr sz="1500" b="1">
                           <a:solidFill>
-                            <a:srgbClr val="71285B"/>
+                            <a:srgbClr val="721D59"/>
                           </a:solidFill>
                         </a:rPr>
                         <a:t>별명</a:t>
@@ -4034,30 +4034,30 @@
                   <a:tcPr anchor="ctr" marL="73152" marR="73152">
                     <a:lnL w="9525" cap="flat" cmpd="sng" algn="ctr">
                       <a:solidFill>
-                        <a:srgbClr val="F1D0E7"/>
+                        <a:srgbClr val="F7D4ED"/>
                       </a:solidFill>
                       <a:prstDash val="solid"/>
                     </a:lnL>
                     <a:lnR w="9525" cap="flat" cmpd="sng" algn="ctr">
                       <a:solidFill>
-                        <a:srgbClr val="F1D0E7"/>
+                        <a:srgbClr val="F7D4ED"/>
                       </a:solidFill>
                       <a:prstDash val="solid"/>
                     </a:lnR>
                     <a:lnT w="9525" cap="flat" cmpd="sng" algn="ctr">
                       <a:solidFill>
-                        <a:srgbClr val="F1D0E7"/>
+                        <a:srgbClr val="F7D4ED"/>
                       </a:solidFill>
                       <a:prstDash val="solid"/>
                     </a:lnT>
                     <a:lnB w="9525" cap="flat" cmpd="sng" algn="ctr">
                       <a:solidFill>
-                        <a:srgbClr val="F1D0E7"/>
+                        <a:srgbClr val="F7D4ED"/>
                       </a:solidFill>
                       <a:prstDash val="solid"/>
                     </a:lnB>
                     <a:solidFill>
-                      <a:srgbClr val="F1D0E7"/>
+                      <a:srgbClr val="F7D4ED"/>
                     </a:solidFill>
                   </a:tcPr>
                 </a:tc>
@@ -4080,30 +4080,30 @@
                   <a:tcPr anchor="ctr" marL="73152" marR="73152">
                     <a:lnL w="9525" cap="flat" cmpd="sng" algn="ctr">
                       <a:solidFill>
-                        <a:srgbClr val="F1D0E7"/>
+                        <a:srgbClr val="F7D4ED"/>
                       </a:solidFill>
                       <a:prstDash val="solid"/>
                     </a:lnL>
                     <a:lnR w="9525" cap="flat" cmpd="sng" algn="ctr">
                       <a:solidFill>
-                        <a:srgbClr val="F1D0E7"/>
+                        <a:srgbClr val="F7D4ED"/>
                       </a:solidFill>
                       <a:prstDash val="solid"/>
                     </a:lnR>
                     <a:lnT w="9525" cap="flat" cmpd="sng" algn="ctr">
                       <a:solidFill>
-                        <a:srgbClr val="F1D0E7"/>
+                        <a:srgbClr val="F7D4ED"/>
                       </a:solidFill>
                       <a:prstDash val="solid"/>
                     </a:lnT>
                     <a:lnB w="9525" cap="flat" cmpd="sng" algn="ctr">
                       <a:solidFill>
-                        <a:srgbClr val="F1D0E7"/>
+                        <a:srgbClr val="F7D4ED"/>
                       </a:solidFill>
                       <a:prstDash val="solid"/>
                     </a:lnB>
                     <a:solidFill>
-                      <a:srgbClr val="FAF0F7"/>
+                      <a:srgbClr val="FCF3F9"/>
                     </a:solidFill>
                   </a:tcPr>
                 </a:tc>
@@ -4118,7 +4118,7 @@
                       <a:r>
                         <a:rPr sz="1500" b="1">
                           <a:solidFill>
-                            <a:srgbClr val="71285B"/>
+                            <a:srgbClr val="721D59"/>
                           </a:solidFill>
                         </a:rPr>
                         <a:t>부모의 마음</a:t>
@@ -4128,30 +4128,30 @@
                   <a:tcPr anchor="ctr" marL="73152" marR="73152">
                     <a:lnL w="9525" cap="flat" cmpd="sng" algn="ctr">
                       <a:solidFill>
-                        <a:srgbClr val="F1D0E7"/>
+                        <a:srgbClr val="F7D4ED"/>
                       </a:solidFill>
                       <a:prstDash val="solid"/>
                     </a:lnL>
                     <a:lnR w="9525" cap="flat" cmpd="sng" algn="ctr">
                       <a:solidFill>
-                        <a:srgbClr val="F1D0E7"/>
+                        <a:srgbClr val="F7D4ED"/>
                       </a:solidFill>
                       <a:prstDash val="solid"/>
                     </a:lnR>
                     <a:lnT w="9525" cap="flat" cmpd="sng" algn="ctr">
                       <a:solidFill>
-                        <a:srgbClr val="F1D0E7"/>
+                        <a:srgbClr val="F7D4ED"/>
                       </a:solidFill>
                       <a:prstDash val="solid"/>
                     </a:lnT>
                     <a:lnB w="9525" cap="flat" cmpd="sng" algn="ctr">
                       <a:solidFill>
-                        <a:srgbClr val="F1D0E7"/>
+                        <a:srgbClr val="F7D4ED"/>
                       </a:solidFill>
                       <a:prstDash val="solid"/>
                     </a:lnB>
                     <a:solidFill>
-                      <a:srgbClr val="F1D0E7"/>
+                      <a:srgbClr val="F7D4ED"/>
                     </a:solidFill>
                   </a:tcPr>
                 </a:tc>
@@ -4174,25 +4174,25 @@
                   <a:tcPr anchor="ctr" marL="73152" marR="73152">
                     <a:lnL w="9525" cap="flat" cmpd="sng" algn="ctr">
                       <a:solidFill>
-                        <a:srgbClr val="F1D0E7"/>
+                        <a:srgbClr val="F7D4ED"/>
                       </a:solidFill>
                       <a:prstDash val="solid"/>
                     </a:lnL>
                     <a:lnR w="9525" cap="flat" cmpd="sng" algn="ctr">
                       <a:solidFill>
-                        <a:srgbClr val="F1D0E7"/>
+                        <a:srgbClr val="F7D4ED"/>
                       </a:solidFill>
                       <a:prstDash val="solid"/>
                     </a:lnR>
                     <a:lnT w="9525" cap="flat" cmpd="sng" algn="ctr">
                       <a:solidFill>
-                        <a:srgbClr val="F1D0E7"/>
+                        <a:srgbClr val="F7D4ED"/>
                       </a:solidFill>
                       <a:prstDash val="solid"/>
                     </a:lnT>
                     <a:lnB w="9525" cap="flat" cmpd="sng" algn="ctr">
                       <a:solidFill>
-                        <a:srgbClr val="F1D0E7"/>
+                        <a:srgbClr val="F7D4ED"/>
                       </a:solidFill>
                       <a:prstDash val="solid"/>
                     </a:lnB>
@@ -4247,7 +4247,7 @@
             <a:avLst/>
           </a:prstGeom>
           <a:solidFill>
-            <a:srgbClr val="F1D0E7"/>
+            <a:srgbClr val="F7D4ED"/>
           </a:solidFill>
           <a:ln>
             <a:noFill/>
@@ -4276,7 +4276,7 @@
             <a:avLst/>
           </a:prstGeom>
           <a:solidFill>
-            <a:srgbClr val="BD4298"/>
+            <a:srgbClr val="D345A9"/>
           </a:solidFill>
           <a:ln>
             <a:noFill/>
@@ -4320,7 +4320,7 @@
             <a:r>
               <a:rPr sz="3000" b="1" i="0">
                 <a:solidFill>
-                  <a:srgbClr val="71285B"/>
+                  <a:srgbClr val="721D59"/>
                 </a:solidFill>
               </a:rPr>
               <a:t>돌잡이 이야기</a:t>
@@ -4345,11 +4345,11 @@
             </a:avLst>
           </a:prstGeom>
           <a:solidFill>
-            <a:srgbClr val="FAF0F7"/>
+            <a:srgbClr val="FCF3F9"/>
           </a:solidFill>
           <a:ln w="15875">
             <a:solidFill>
-              <a:srgbClr val="F1D0E7"/>
+              <a:srgbClr val="F7D4ED"/>
             </a:solidFill>
           </a:ln>
         </p:spPr>
@@ -4376,7 +4376,7 @@
             <a:avLst/>
           </a:prstGeom>
           <a:solidFill>
-            <a:srgbClr val="BD4298"/>
+            <a:srgbClr val="D345A9"/>
           </a:solidFill>
           <a:ln>
             <a:noFill/>
@@ -4434,7 +4434,7 @@
             <a:r>
               <a:rPr sz="1600" b="1" i="0">
                 <a:solidFill>
-                  <a:srgbClr val="71285B"/>
+                  <a:srgbClr val="721D59"/>
                 </a:solidFill>
               </a:rPr>
               <a:t>연필 · 공부</a:t>
@@ -4497,11 +4497,11 @@
             </a:avLst>
           </a:prstGeom>
           <a:solidFill>
-            <a:srgbClr val="FAF0F7"/>
+            <a:srgbClr val="FCF3F9"/>
           </a:solidFill>
           <a:ln w="15875">
             <a:solidFill>
-              <a:srgbClr val="F1D0E7"/>
+              <a:srgbClr val="F7D4ED"/>
             </a:solidFill>
           </a:ln>
         </p:spPr>
@@ -4528,7 +4528,7 @@
             <a:avLst/>
           </a:prstGeom>
           <a:solidFill>
-            <a:srgbClr val="BD4298"/>
+            <a:srgbClr val="D345A9"/>
           </a:solidFill>
           <a:ln>
             <a:noFill/>
@@ -4586,7 +4586,7 @@
             <a:r>
               <a:rPr sz="1600" b="1" i="0">
                 <a:solidFill>
-                  <a:srgbClr val="71285B"/>
+                  <a:srgbClr val="721D59"/>
                 </a:solidFill>
               </a:rPr>
               <a:t>실 · 장수</a:t>
@@ -4649,11 +4649,11 @@
             </a:avLst>
           </a:prstGeom>
           <a:solidFill>
-            <a:srgbClr val="FAF0F7"/>
+            <a:srgbClr val="FCF3F9"/>
           </a:solidFill>
           <a:ln w="15875">
             <a:solidFill>
-              <a:srgbClr val="F1D0E7"/>
+              <a:srgbClr val="F7D4ED"/>
             </a:solidFill>
           </a:ln>
         </p:spPr>
@@ -4680,7 +4680,7 @@
             <a:avLst/>
           </a:prstGeom>
           <a:solidFill>
-            <a:srgbClr val="BD4298"/>
+            <a:srgbClr val="D345A9"/>
           </a:solidFill>
           <a:ln>
             <a:noFill/>
@@ -4738,7 +4738,7 @@
             <a:r>
               <a:rPr sz="1600" b="1" i="0">
                 <a:solidFill>
-                  <a:srgbClr val="71285B"/>
+                  <a:srgbClr val="721D59"/>
                 </a:solidFill>
               </a:rPr>
               <a:t>돈 · 부</a:t>
@@ -4801,11 +4801,11 @@
             </a:avLst>
           </a:prstGeom>
           <a:solidFill>
-            <a:srgbClr val="FAF0F7"/>
+            <a:srgbClr val="FCF3F9"/>
           </a:solidFill>
           <a:ln w="15875">
             <a:solidFill>
-              <a:srgbClr val="F1D0E7"/>
+              <a:srgbClr val="F7D4ED"/>
             </a:solidFill>
           </a:ln>
         </p:spPr>
@@ -4832,7 +4832,7 @@
             <a:avLst/>
           </a:prstGeom>
           <a:solidFill>
-            <a:srgbClr val="BD4298"/>
+            <a:srgbClr val="D345A9"/>
           </a:solidFill>
           <a:ln>
             <a:noFill/>
@@ -4890,7 +4890,7 @@
             <a:r>
               <a:rPr sz="1600" b="1" i="0">
                 <a:solidFill>
-                  <a:srgbClr val="71285B"/>
+                  <a:srgbClr val="721D59"/>
                 </a:solidFill>
               </a:rPr>
               <a:t>마이크 · 인기</a:t>
@@ -4977,7 +4977,7 @@
             <a:avLst/>
           </a:prstGeom>
           <a:solidFill>
-            <a:srgbClr val="F1D0E7"/>
+            <a:srgbClr val="F7D4ED"/>
           </a:solidFill>
           <a:ln>
             <a:noFill/>
@@ -5006,7 +5006,7 @@
             <a:avLst/>
           </a:prstGeom>
           <a:solidFill>
-            <a:srgbClr val="BD4298"/>
+            <a:srgbClr val="D345A9"/>
           </a:solidFill>
           <a:ln>
             <a:noFill/>
@@ -5050,7 +5050,7 @@
             <a:r>
               <a:rPr sz="3000" b="1" i="0">
                 <a:solidFill>
-                  <a:srgbClr val="71285B"/>
+                  <a:srgbClr val="721D59"/>
                 </a:solidFill>
               </a:rPr>
               <a:t>우리 아기의 선택은?</a:t>
@@ -5075,11 +5075,11 @@
             </a:avLst>
           </a:prstGeom>
           <a:solidFill>
-            <a:srgbClr val="F1D0E7"/>
+            <a:srgbClr val="F7D4ED"/>
           </a:solidFill>
           <a:ln w="19050">
             <a:solidFill>
-              <a:srgbClr val="BD4298"/>
+              <a:srgbClr val="D345A9"/>
             </a:solidFill>
             <a:prstDash val="dash"/>
           </a:ln>
@@ -5098,7 +5098,7 @@
             <a:r>
               <a:rPr sz="1400" b="0" i="0">
                 <a:solidFill>
-                  <a:srgbClr val="71285B"/>
+                  <a:srgbClr val="721D59"/>
                 </a:solidFill>
               </a:rPr>
               <a:t>돌잡이 사진</a:t>
@@ -5123,11 +5123,11 @@
             </a:avLst>
           </a:prstGeom>
           <a:solidFill>
-            <a:srgbClr val="FAF0F7"/>
+            <a:srgbClr val="FCF3F9"/>
           </a:solidFill>
           <a:ln w="12700">
             <a:solidFill>
-              <a:srgbClr val="F1D0E7"/>
+              <a:srgbClr val="F7D4ED"/>
             </a:solidFill>
           </a:ln>
         </p:spPr>
@@ -5278,7 +5278,7 @@
             <a:avLst/>
           </a:prstGeom>
           <a:solidFill>
-            <a:srgbClr val="F1D0E7"/>
+            <a:srgbClr val="F7D4ED"/>
           </a:solidFill>
           <a:ln>
             <a:noFill/>
@@ -5307,7 +5307,7 @@
             <a:avLst/>
           </a:prstGeom>
           <a:solidFill>
-            <a:srgbClr val="BD4298"/>
+            <a:srgbClr val="D345A9"/>
           </a:solidFill>
           <a:ln>
             <a:noFill/>
@@ -5351,7 +5351,7 @@
             <a:r>
               <a:rPr sz="3000" b="1" i="0">
                 <a:solidFill>
-                  <a:srgbClr val="71285B"/>
+                  <a:srgbClr val="721D59"/>
                 </a:solidFill>
               </a:rPr>
               <a:t>사진 모음</a:t>
@@ -5376,11 +5376,11 @@
             </a:avLst>
           </a:prstGeom>
           <a:solidFill>
-            <a:srgbClr val="F1D0E7"/>
+            <a:srgbClr val="F7D4ED"/>
           </a:solidFill>
           <a:ln w="19050">
             <a:solidFill>
-              <a:srgbClr val="BD4298"/>
+              <a:srgbClr val="D345A9"/>
             </a:solidFill>
             <a:prstDash val="dash"/>
           </a:ln>
@@ -5399,7 +5399,7 @@
             <a:r>
               <a:rPr sz="1200" b="0" i="0">
                 <a:solidFill>
-                  <a:srgbClr val="71285B"/>
+                  <a:srgbClr val="721D59"/>
                 </a:solidFill>
               </a:rPr>
               <a:t>사진 1</a:t>
@@ -5424,11 +5424,11 @@
             </a:avLst>
           </a:prstGeom>
           <a:solidFill>
-            <a:srgbClr val="F1D0E7"/>
+            <a:srgbClr val="F7D4ED"/>
           </a:solidFill>
           <a:ln w="19050">
             <a:solidFill>
-              <a:srgbClr val="BD4298"/>
+              <a:srgbClr val="D345A9"/>
             </a:solidFill>
             <a:prstDash val="dash"/>
           </a:ln>
@@ -5447,7 +5447,7 @@
             <a:r>
               <a:rPr sz="1200" b="0" i="0">
                 <a:solidFill>
-                  <a:srgbClr val="71285B"/>
+                  <a:srgbClr val="721D59"/>
                 </a:solidFill>
               </a:rPr>
               <a:t>사진 2</a:t>
@@ -5472,11 +5472,11 @@
             </a:avLst>
           </a:prstGeom>
           <a:solidFill>
-            <a:srgbClr val="F1D0E7"/>
+            <a:srgbClr val="F7D4ED"/>
           </a:solidFill>
           <a:ln w="19050">
             <a:solidFill>
-              <a:srgbClr val="BD4298"/>
+              <a:srgbClr val="D345A9"/>
             </a:solidFill>
             <a:prstDash val="dash"/>
           </a:ln>
@@ -5495,7 +5495,7 @@
             <a:r>
               <a:rPr sz="1200" b="0" i="0">
                 <a:solidFill>
-                  <a:srgbClr val="71285B"/>
+                  <a:srgbClr val="721D59"/>
                 </a:solidFill>
               </a:rPr>
               <a:t>사진 3</a:t>
@@ -5520,11 +5520,11 @@
             </a:avLst>
           </a:prstGeom>
           <a:solidFill>
-            <a:srgbClr val="F1D0E7"/>
+            <a:srgbClr val="F7D4ED"/>
           </a:solidFill>
           <a:ln w="19050">
             <a:solidFill>
-              <a:srgbClr val="BD4298"/>
+              <a:srgbClr val="D345A9"/>
             </a:solidFill>
             <a:prstDash val="dash"/>
           </a:ln>
@@ -5543,7 +5543,7 @@
             <a:r>
               <a:rPr sz="1200" b="0" i="0">
                 <a:solidFill>
-                  <a:srgbClr val="71285B"/>
+                  <a:srgbClr val="721D59"/>
                 </a:solidFill>
               </a:rPr>
               <a:t>사진 4</a:t>
@@ -5568,11 +5568,11 @@
             </a:avLst>
           </a:prstGeom>
           <a:solidFill>
-            <a:srgbClr val="F1D0E7"/>
+            <a:srgbClr val="F7D4ED"/>
           </a:solidFill>
           <a:ln w="19050">
             <a:solidFill>
-              <a:srgbClr val="BD4298"/>
+              <a:srgbClr val="D345A9"/>
             </a:solidFill>
             <a:prstDash val="dash"/>
           </a:ln>
@@ -5591,7 +5591,7 @@
             <a:r>
               <a:rPr sz="1200" b="0" i="0">
                 <a:solidFill>
-                  <a:srgbClr val="71285B"/>
+                  <a:srgbClr val="721D59"/>
                 </a:solidFill>
               </a:rPr>
               <a:t>사진 5</a:t>
@@ -5616,11 +5616,11 @@
             </a:avLst>
           </a:prstGeom>
           <a:solidFill>
-            <a:srgbClr val="F1D0E7"/>
+            <a:srgbClr val="F7D4ED"/>
           </a:solidFill>
           <a:ln w="19050">
             <a:solidFill>
-              <a:srgbClr val="BD4298"/>
+              <a:srgbClr val="D345A9"/>
             </a:solidFill>
             <a:prstDash val="dash"/>
           </a:ln>
@@ -5639,7 +5639,7 @@
             <a:r>
               <a:rPr sz="1200" b="0" i="0">
                 <a:solidFill>
-                  <a:srgbClr val="71285B"/>
+                  <a:srgbClr val="721D59"/>
                 </a:solidFill>
               </a:rPr>
               <a:t>사진 6</a:t>
@@ -5664,11 +5664,11 @@
             </a:avLst>
           </a:prstGeom>
           <a:solidFill>
-            <a:srgbClr val="F1D0E7"/>
+            <a:srgbClr val="F7D4ED"/>
           </a:solidFill>
           <a:ln w="19050">
             <a:solidFill>
-              <a:srgbClr val="BD4298"/>
+              <a:srgbClr val="D345A9"/>
             </a:solidFill>
             <a:prstDash val="dash"/>
           </a:ln>
@@ -5687,7 +5687,7 @@
             <a:r>
               <a:rPr sz="1200" b="0" i="0">
                 <a:solidFill>
-                  <a:srgbClr val="71285B"/>
+                  <a:srgbClr val="721D59"/>
                 </a:solidFill>
               </a:rPr>
               <a:t>사진 7</a:t>
@@ -5712,11 +5712,11 @@
             </a:avLst>
           </a:prstGeom>
           <a:solidFill>
-            <a:srgbClr val="F1D0E7"/>
+            <a:srgbClr val="F7D4ED"/>
           </a:solidFill>
           <a:ln w="19050">
             <a:solidFill>
-              <a:srgbClr val="BD4298"/>
+              <a:srgbClr val="D345A9"/>
             </a:solidFill>
             <a:prstDash val="dash"/>
           </a:ln>
@@ -5735,7 +5735,7 @@
             <a:r>
               <a:rPr sz="1200" b="0" i="0">
                 <a:solidFill>
-                  <a:srgbClr val="71285B"/>
+                  <a:srgbClr val="721D59"/>
                 </a:solidFill>
               </a:rPr>
               <a:t>사진 8</a:t>
@@ -5815,7 +5815,7 @@
             <a:r>
               <a:rPr sz="3400" b="1" i="0">
                 <a:solidFill>
-                  <a:srgbClr val="71285B"/>
+                  <a:srgbClr val="721D59"/>
                 </a:solidFill>
               </a:rPr>
               <a:t>와 주셔서 고맙습니다</a:t>
@@ -5853,7 +5853,7 @@
             <a:r>
               <a:rPr sz="1700" b="0" i="1">
                 <a:solidFill>
-                  <a:srgbClr val="71285B"/>
+                  <a:srgbClr val="721D59"/>
                 </a:solidFill>
               </a:rPr>
               <a:t>아이가 한 살이 되었습니다</a:t>
@@ -5918,34 +5918,34 @@
         <a:sysClr val="window" lastClr="FFFFFF"/>
       </a:lt1>
       <a:dk2>
-        <a:srgbClr val="71285B"/>
+        <a:srgbClr val="721D59"/>
       </a:dk2>
       <a:lt2>
-        <a:srgbClr val="FAF0F7"/>
+        <a:srgbClr val="FCF3F9"/>
       </a:lt2>
       <a:accent1>
-        <a:srgbClr val="BD4298"/>
+        <a:srgbClr val="D345A9"/>
       </a:accent1>
       <a:accent2>
-        <a:srgbClr val="4C913B"/>
+        <a:srgbClr val="339941"/>
       </a:accent2>
       <a:accent3>
-        <a:srgbClr val="71285B"/>
+        <a:srgbClr val="721D59"/>
       </a:accent3>
       <a:accent4>
-        <a:srgbClr val="F1D0E7"/>
+        <a:srgbClr val="F7D4ED"/>
       </a:accent4>
       <a:accent5>
-        <a:srgbClr val="846A6A"/>
+        <a:srgbClr val="836F75"/>
       </a:accent5>
       <a:accent6>
-        <a:srgbClr val="AA7E9D"/>
+        <a:srgbClr val="AA779B"/>
       </a:accent6>
       <a:hlink>
-        <a:srgbClr val="BD4298"/>
+        <a:srgbClr val="D345A9"/>
       </a:hlink>
       <a:folHlink>
-        <a:srgbClr val="71285B"/>
+        <a:srgbClr val="721D59"/>
       </a:folHlink>
     </a:clrScheme>
     <a:fontScheme name="Office">

--- a/public/fun/pack/pptx/birthday/돌잔치_07_돌잡이중심_뒷산진달래.pptx
+++ b/public/fun/pack/pptx/birthday/돌잔치_07_돌잡이중심_뒷산진달래.pptx
@@ -3286,6 +3286,14 @@
 <file path=ppt/slides/slide1.xml><?xml version="1.0" encoding="utf-8"?>
 <p:sld xmlns:a="http://schemas.openxmlformats.org/drawingml/2006/main" xmlns:p="http://schemas.openxmlformats.org/presentationml/2006/main" xmlns:r="http://schemas.openxmlformats.org/officeDocument/2006/relationships">
   <p:cSld>
+    <p:bg>
+      <p:bgPr>
+        <a:solidFill>
+          <a:srgbClr val="FDEAF7"/>
+        </a:solidFill>
+        <a:effectLst/>
+      </p:bgPr>
+    </p:bg>
     <p:spTree>
       <p:nvGrpSpPr>
         <p:cNvPr id="1" name=""/>
@@ -3293,30 +3301,119 @@
         <p:nvPr/>
       </p:nvGrpSpPr>
       <p:grpSpPr/>
-      <p:pic>
-        <p:nvPicPr>
-          <p:cNvPr id="3" name="표지 그림" descr="birthday-07.jpg"/>
-          <p:cNvPicPr>
-            <a:picLocks noChangeAspect="1"/>
-          </p:cNvPicPr>
+      <p:sp>
+        <p:nvSpPr>
+          <p:cNvPr id="3" name="사진 자리"/>
+          <p:cNvSpPr/>
           <p:nvPr/>
-        </p:nvPicPr>
-        <p:blipFill>
-          <a:blip r:embed="rId2"/>
-          <a:stretch>
-            <a:fillRect/>
-          </a:stretch>
-        </p:blipFill>
-        <p:spPr>
-          <a:xfrm>
-            <a:off x="0" y="0"/>
-            <a:ext cx="12191695" cy="6858000"/>
+        </p:nvSpPr>
+        <p:spPr>
+          <a:xfrm>
+            <a:off x="7558851" y="685800"/>
+            <a:ext cx="3169840" cy="5486400"/>
+          </a:xfrm>
+          <a:prstGeom prst="round2SameRect">
+            <a:avLst>
+              <a:gd name="adj1" fmla="val 50000"/>
+              <a:gd name="adj2" fmla="val 0"/>
+            </a:avLst>
+          </a:prstGeom>
+          <a:solidFill>
+            <a:srgbClr val="F2A6DB"/>
+          </a:solidFill>
+          <a:ln>
+            <a:noFill/>
+          </a:ln>
+        </p:spPr>
+        <p:txBody>
+          <a:bodyPr rtlCol="0" anchor="ctr" wrap="square" lIns="54864" rIns="54864" tIns="27432" bIns="27432">
+            <a:noAutofit/>
+          </a:bodyPr>
+          <a:lstStyle/>
+          <a:p>
+            <a:pPr algn="ctr">
+              <a:lnSpc>
+                <a:spcPct val="100000"/>
+              </a:lnSpc>
+            </a:pPr>
+            <a:r>
+              <a:rPr sz="1400" b="0" i="0">
+                <a:solidFill>
+                  <a:srgbClr val="49273F"/>
+                </a:solidFill>
+              </a:rPr>
+              <a:t>사진을 넣어 주세요</a:t>
+            </a:r>
+          </a:p>
+        </p:txBody>
+      </p:sp>
+      <p:sp>
+        <p:nvSpPr>
+          <p:cNvPr id="4" name="장식"/>
+          <p:cNvSpPr/>
+          <p:nvPr/>
+        </p:nvSpPr>
+        <p:spPr>
+          <a:xfrm>
+            <a:off x="6827349" y="4251960"/>
+            <a:ext cx="1005840" cy="1005840"/>
+          </a:xfrm>
+          <a:prstGeom prst="ellipse">
+            <a:avLst/>
+          </a:prstGeom>
+          <a:solidFill>
+            <a:srgbClr val="F2A6DB"/>
+          </a:solidFill>
+          <a:ln>
+            <a:noFill/>
+          </a:ln>
+        </p:spPr>
+        <p:txBody>
+          <a:bodyPr rtlCol="0" anchor="ctr"/>
+          <a:lstStyle/>
+          <a:p>
+            <a:pPr algn="ctr"/>
+          </a:p>
+        </p:txBody>
+      </p:sp>
+      <p:sp>
+        <p:nvSpPr>
+          <p:cNvPr id="5" name="라벨"/>
+          <p:cNvSpPr txBox="1"/>
+          <p:nvPr/>
+        </p:nvSpPr>
+        <p:spPr>
+          <a:xfrm>
+            <a:off x="822960" y="2148840"/>
+            <a:ext cx="5608179" cy="274320"/>
           </a:xfrm>
           <a:prstGeom prst="rect">
             <a:avLst/>
           </a:prstGeom>
-        </p:spPr>
-      </p:pic>
+          <a:noFill/>
+        </p:spPr>
+        <p:txBody>
+          <a:bodyPr wrap="square" lIns="54864" rIns="54864" tIns="27432" bIns="27432" anchor="t">
+            <a:noAutofit/>
+          </a:bodyPr>
+          <a:lstStyle/>
+          <a:p>
+            <a:pPr algn="l">
+              <a:lnSpc>
+                <a:spcPct val="115000"/>
+              </a:lnSpc>
+            </a:pPr>
+            <a:r>
+              <a:rPr sz="1000" b="1" i="0" spc="250">
+                <a:solidFill>
+                  <a:srgbClr val="26231F"/>
+                </a:solidFill>
+              </a:rPr>
+              <a:t>FIRST BIRTHDAY</a:t>
+            </a:r>
+          </a:p>
+        </p:txBody>
+      </p:sp>
       <p:sp>
         <p:nvSpPr>
           <p:cNvPr id="2" name="Title 1"/>
@@ -3329,8 +3426,8 @@
         </p:nvSpPr>
         <p:spPr>
           <a:xfrm>
-            <a:off x="853418" y="2057400"/>
-            <a:ext cx="6095847" cy="1554480"/>
+            <a:off x="822960" y="2606040"/>
+            <a:ext cx="5608179" cy="1188720"/>
           </a:xfrm>
         </p:spPr>
         <p:txBody>
@@ -3347,7 +3444,7 @@
             <a:r>
               <a:rPr sz="4000" b="1" i="0">
                 <a:solidFill>
-                  <a:srgbClr val="721D59"/>
+                  <a:srgbClr val="26231F"/>
                 </a:solidFill>
               </a:rPr>
               <a:t>첫 번째 생일</a:t>
@@ -3357,14 +3454,14 @@
       </p:sp>
       <p:sp>
         <p:nvSpPr>
-          <p:cNvPr id="4" name="한 줄 문구"/>
+          <p:cNvPr id="6" name="한 줄 문구"/>
           <p:cNvSpPr txBox="1"/>
           <p:nvPr/>
         </p:nvSpPr>
         <p:spPr>
           <a:xfrm>
-            <a:off x="853418" y="3749039"/>
-            <a:ext cx="6095847" cy="822960"/>
+            <a:off x="822960" y="3886200"/>
+            <a:ext cx="5608179" cy="822960"/>
           </a:xfrm>
           <a:prstGeom prst="rect">
             <a:avLst/>
@@ -3383,9 +3480,9 @@
               </a:lnSpc>
             </a:pPr>
             <a:r>
-              <a:rPr sz="1700" b="0" i="1">
-                <a:solidFill>
-                  <a:srgbClr val="721D59"/>
+              <a:rPr sz="1700" b="0" i="0">
+                <a:solidFill>
+                  <a:srgbClr val="26231F"/>
                 </a:solidFill>
               </a:rPr>
               <a:t>돌상 앞에서 한참 고민하던 아기</a:t>
@@ -3395,14 +3492,14 @@
       </p:sp>
       <p:sp>
         <p:nvSpPr>
-          <p:cNvPr id="5" name="안내 문구"/>
+          <p:cNvPr id="7" name="안내 문구"/>
           <p:cNvSpPr txBox="1"/>
           <p:nvPr/>
         </p:nvSpPr>
         <p:spPr>
           <a:xfrm>
-            <a:off x="853418" y="4617720"/>
-            <a:ext cx="6095847" cy="914400"/>
+            <a:off x="822960" y="4754880"/>
+            <a:ext cx="5608179" cy="914400"/>
           </a:xfrm>
           <a:prstGeom prst="rect">
             <a:avLst/>
@@ -3423,10 +3520,10 @@
             <a:r>
               <a:rPr sz="1400" b="0" i="0">
                 <a:solidFill>
-                  <a:srgbClr val="666666"/>
+                  <a:srgbClr val="26231F"/>
                 </a:solidFill>
               </a:rPr>
-              <a:t>아기 이름 · 2027. 00. 00</a:t>
+              <a:t>아기 이름 · 날짜 입력</a:t>
             </a:r>
           </a:p>
           <a:p>
@@ -3438,7 +3535,7 @@
             <a:r>
               <a:rPr sz="1400" b="0" i="0">
                 <a:solidFill>
-                  <a:srgbClr val="666666"/>
+                  <a:srgbClr val="26231F"/>
                 </a:solidFill>
               </a:rPr>
               <a:t>장소를 입력하세요</a:t>
@@ -3460,7 +3557,7 @@
     <p:bg>
       <p:bgPr>
         <a:solidFill>
-          <a:srgbClr val="FFFFFF"/>
+          <a:srgbClr val="FDFAFC"/>
         </a:solidFill>
         <a:effectLst/>
       </p:bgPr>
@@ -3480,14 +3577,14 @@
         </p:nvSpPr>
         <p:spPr>
           <a:xfrm>
-            <a:off x="-182880" y="6144768"/>
-            <a:ext cx="12557455" cy="731520"/>
-          </a:xfrm>
-          <a:prstGeom prst="wave">
+            <a:off x="640080" y="566928"/>
+            <a:ext cx="10911535" cy="10972"/>
+          </a:xfrm>
+          <a:prstGeom prst="rect">
             <a:avLst/>
           </a:prstGeom>
           <a:solidFill>
-            <a:srgbClr val="F7D4ED"/>
+            <a:srgbClr val="26231F"/>
           </a:solidFill>
           <a:ln>
             <a:noFill/>
@@ -3503,20 +3600,58 @@
       </p:sp>
       <p:sp>
         <p:nvSpPr>
-          <p:cNvPr id="4" name="장식"/>
+          <p:cNvPr id="4" name="상단 라벨"/>
+          <p:cNvSpPr txBox="1"/>
+          <p:nvPr/>
+        </p:nvSpPr>
+        <p:spPr>
+          <a:xfrm>
+            <a:off x="640080" y="237744"/>
+            <a:ext cx="5486400" cy="274320"/>
+          </a:xfrm>
+          <a:prstGeom prst="rect">
+            <a:avLst/>
+          </a:prstGeom>
+          <a:noFill/>
+        </p:spPr>
+        <p:txBody>
+          <a:bodyPr wrap="square" lIns="54864" rIns="54864" tIns="27432" bIns="27432" anchor="ctr">
+            <a:noAutofit/>
+          </a:bodyPr>
+          <a:lstStyle/>
+          <a:p>
+            <a:pPr algn="l">
+              <a:lnSpc>
+                <a:spcPct val="115000"/>
+              </a:lnSpc>
+            </a:pPr>
+            <a:r>
+              <a:rPr sz="900" b="1" i="0" spc="250">
+                <a:solidFill>
+                  <a:srgbClr val="26231F"/>
+                </a:solidFill>
+              </a:rPr>
+              <a:t>FIRST BIRTHDAY</a:t>
+            </a:r>
+          </a:p>
+        </p:txBody>
+      </p:sp>
+      <p:sp>
+        <p:nvSpPr>
+          <p:cNvPr id="5" name="포인트"/>
           <p:cNvSpPr/>
           <p:nvPr/>
         </p:nvSpPr>
         <p:spPr>
           <a:xfrm>
-            <a:off x="-182880" y="6400800"/>
-            <a:ext cx="12557455" cy="502920"/>
-          </a:xfrm>
-          <a:prstGeom prst="wave">
+            <a:off x="11204143" y="246888"/>
+            <a:ext cx="237744" cy="237744"/>
+          </a:xfrm>
+          <a:prstGeom prst="sun">
             <a:avLst/>
           </a:prstGeom>
           <a:solidFill>
-            <a:srgbClr val="D345A9"/>
+            <a:srgbClr val="ED97D3"/>
           </a:solidFill>
           <a:ln>
             <a:noFill/>
@@ -3542,8 +3677,8 @@
         </p:nvSpPr>
         <p:spPr>
           <a:xfrm>
-            <a:off x="640080" y="457200"/>
-            <a:ext cx="9722815" cy="868680"/>
+            <a:off x="640080" y="731520"/>
+            <a:ext cx="10911535" cy="822960"/>
           </a:xfrm>
         </p:spPr>
         <p:txBody>
@@ -3560,7 +3695,7 @@
             <a:r>
               <a:rPr sz="3000" b="1" i="0">
                 <a:solidFill>
-                  <a:srgbClr val="721D59"/>
+                  <a:srgbClr val="26231F"/>
                 </a:solidFill>
               </a:rPr>
               <a:t>우리 아기를 소개합니다</a:t>
@@ -3570,14 +3705,14 @@
       </p:sp>
       <p:sp>
         <p:nvSpPr>
-          <p:cNvPr id="5" name="사진 자리"/>
+          <p:cNvPr id="6" name="사진 자리"/>
           <p:cNvSpPr/>
           <p:nvPr/>
         </p:nvSpPr>
         <p:spPr>
           <a:xfrm>
-            <a:off x="640080" y="1554480"/>
-            <a:ext cx="3840480" cy="4206240"/>
+            <a:off x="640080" y="1783080"/>
+            <a:ext cx="3840480" cy="4389120"/>
           </a:xfrm>
           <a:prstGeom prst="roundRect">
             <a:avLst>
@@ -3585,12 +3720,10 @@
             </a:avLst>
           </a:prstGeom>
           <a:solidFill>
-            <a:srgbClr val="F7D4ED"/>
+            <a:srgbClr val="FAD1EE"/>
           </a:solidFill>
           <a:ln w="19050">
-            <a:solidFill>
-              <a:srgbClr val="D345A9"/>
-            </a:solidFill>
+            <a:noFill/>
             <a:prstDash val="dash"/>
           </a:ln>
         </p:spPr>
@@ -3608,7 +3741,7 @@
             <a:r>
               <a:rPr sz="1400" b="0" i="0">
                 <a:solidFill>
-                  <a:srgbClr val="721D59"/>
+                  <a:srgbClr val="8E8780"/>
                 </a:solidFill>
               </a:rPr>
               <a:t>아기 사진을 넣어 주세요</a:t>
@@ -3618,14 +3751,14 @@
       </p:sp>
       <p:graphicFrame>
         <p:nvGraphicFramePr>
-          <p:cNvPr id="6" name="표"/>
+          <p:cNvPr id="7" name="표"/>
           <p:cNvGraphicFramePr>
             <a:graphicFrameLocks noGrp="1"/>
           </p:cNvGraphicFramePr>
           <p:nvPr/>
         </p:nvGraphicFramePr>
         <p:xfrm>
-          <a:off x="4846320" y="1554480"/>
+          <a:off x="4846320" y="1783080"/>
           <a:ext cx="6705295" cy="3950208"/>
         </p:xfrm>
         <a:graphic>
@@ -3648,7 +3781,7 @@
                       <a:r>
                         <a:rPr sz="1500" b="1">
                           <a:solidFill>
-                            <a:srgbClr val="721D59"/>
+                            <a:srgbClr val="49273F"/>
                           </a:solidFill>
                         </a:rPr>
                         <a:t>이름</a:t>
@@ -3658,30 +3791,30 @@
                   <a:tcPr anchor="ctr" marL="73152" marR="73152">
                     <a:lnL w="9525" cap="flat" cmpd="sng" algn="ctr">
                       <a:solidFill>
-                        <a:srgbClr val="F7D4ED"/>
+                        <a:srgbClr val="FAD1EE"/>
                       </a:solidFill>
                       <a:prstDash val="solid"/>
                     </a:lnL>
                     <a:lnR w="9525" cap="flat" cmpd="sng" algn="ctr">
                       <a:solidFill>
-                        <a:srgbClr val="F7D4ED"/>
+                        <a:srgbClr val="FAD1EE"/>
                       </a:solidFill>
                       <a:prstDash val="solid"/>
                     </a:lnR>
                     <a:lnT w="9525" cap="flat" cmpd="sng" algn="ctr">
                       <a:solidFill>
-                        <a:srgbClr val="F7D4ED"/>
+                        <a:srgbClr val="FAD1EE"/>
                       </a:solidFill>
                       <a:prstDash val="solid"/>
                     </a:lnT>
                     <a:lnB w="9525" cap="flat" cmpd="sng" algn="ctr">
                       <a:solidFill>
-                        <a:srgbClr val="F7D4ED"/>
+                        <a:srgbClr val="FAD1EE"/>
                       </a:solidFill>
                       <a:prstDash val="solid"/>
                     </a:lnB>
                     <a:solidFill>
-                      <a:srgbClr val="F7D4ED"/>
+                      <a:srgbClr val="FAD1EE"/>
                     </a:solidFill>
                   </a:tcPr>
                 </a:tc>
@@ -3694,7 +3827,7 @@
                       <a:r>
                         <a:rPr sz="1500" b="0">
                           <a:solidFill>
-                            <a:srgbClr val="2B2B2B"/>
+                            <a:srgbClr val="26231F"/>
                           </a:solidFill>
                         </a:rPr>
                         <a:t>입력하세요</a:t>
@@ -3704,30 +3837,30 @@
                   <a:tcPr anchor="ctr" marL="73152" marR="73152">
                     <a:lnL w="9525" cap="flat" cmpd="sng" algn="ctr">
                       <a:solidFill>
-                        <a:srgbClr val="F7D4ED"/>
+                        <a:srgbClr val="FAD1EE"/>
                       </a:solidFill>
                       <a:prstDash val="solid"/>
                     </a:lnL>
                     <a:lnR w="9525" cap="flat" cmpd="sng" algn="ctr">
                       <a:solidFill>
-                        <a:srgbClr val="F7D4ED"/>
+                        <a:srgbClr val="FAD1EE"/>
                       </a:solidFill>
                       <a:prstDash val="solid"/>
                     </a:lnR>
                     <a:lnT w="9525" cap="flat" cmpd="sng" algn="ctr">
                       <a:solidFill>
-                        <a:srgbClr val="F7D4ED"/>
+                        <a:srgbClr val="FAD1EE"/>
                       </a:solidFill>
                       <a:prstDash val="solid"/>
                     </a:lnT>
                     <a:lnB w="9525" cap="flat" cmpd="sng" algn="ctr">
                       <a:solidFill>
-                        <a:srgbClr val="F7D4ED"/>
+                        <a:srgbClr val="FAD1EE"/>
                       </a:solidFill>
                       <a:prstDash val="solid"/>
                     </a:lnB>
                     <a:solidFill>
-                      <a:srgbClr val="FCF3F9"/>
+                      <a:srgbClr val="FDEAF7"/>
                     </a:solidFill>
                   </a:tcPr>
                 </a:tc>
@@ -3742,7 +3875,7 @@
                       <a:r>
                         <a:rPr sz="1500" b="1">
                           <a:solidFill>
-                            <a:srgbClr val="721D59"/>
+                            <a:srgbClr val="49273F"/>
                           </a:solidFill>
                         </a:rPr>
                         <a:t>생일</a:t>
@@ -3752,30 +3885,30 @@
                   <a:tcPr anchor="ctr" marL="73152" marR="73152">
                     <a:lnL w="9525" cap="flat" cmpd="sng" algn="ctr">
                       <a:solidFill>
-                        <a:srgbClr val="F7D4ED"/>
+                        <a:srgbClr val="FAD1EE"/>
                       </a:solidFill>
                       <a:prstDash val="solid"/>
                     </a:lnL>
                     <a:lnR w="9525" cap="flat" cmpd="sng" algn="ctr">
                       <a:solidFill>
-                        <a:srgbClr val="F7D4ED"/>
+                        <a:srgbClr val="FAD1EE"/>
                       </a:solidFill>
                       <a:prstDash val="solid"/>
                     </a:lnR>
                     <a:lnT w="9525" cap="flat" cmpd="sng" algn="ctr">
                       <a:solidFill>
-                        <a:srgbClr val="F7D4ED"/>
+                        <a:srgbClr val="FAD1EE"/>
                       </a:solidFill>
                       <a:prstDash val="solid"/>
                     </a:lnT>
                     <a:lnB w="9525" cap="flat" cmpd="sng" algn="ctr">
                       <a:solidFill>
-                        <a:srgbClr val="F7D4ED"/>
+                        <a:srgbClr val="FAD1EE"/>
                       </a:solidFill>
                       <a:prstDash val="solid"/>
                     </a:lnB>
                     <a:solidFill>
-                      <a:srgbClr val="F7D4ED"/>
+                      <a:srgbClr val="FAD1EE"/>
                     </a:solidFill>
                   </a:tcPr>
                 </a:tc>
@@ -3788,7 +3921,7 @@
                       <a:r>
                         <a:rPr sz="1500" b="0">
                           <a:solidFill>
-                            <a:srgbClr val="2B2B2B"/>
+                            <a:srgbClr val="26231F"/>
                           </a:solidFill>
                         </a:rPr>
                         <a:t>입력하세요</a:t>
@@ -3798,25 +3931,25 @@
                   <a:tcPr anchor="ctr" marL="73152" marR="73152">
                     <a:lnL w="9525" cap="flat" cmpd="sng" algn="ctr">
                       <a:solidFill>
-                        <a:srgbClr val="F7D4ED"/>
+                        <a:srgbClr val="FAD1EE"/>
                       </a:solidFill>
                       <a:prstDash val="solid"/>
                     </a:lnL>
                     <a:lnR w="9525" cap="flat" cmpd="sng" algn="ctr">
                       <a:solidFill>
-                        <a:srgbClr val="F7D4ED"/>
+                        <a:srgbClr val="FAD1EE"/>
                       </a:solidFill>
                       <a:prstDash val="solid"/>
                     </a:lnR>
                     <a:lnT w="9525" cap="flat" cmpd="sng" algn="ctr">
                       <a:solidFill>
-                        <a:srgbClr val="F7D4ED"/>
+                        <a:srgbClr val="FAD1EE"/>
                       </a:solidFill>
                       <a:prstDash val="solid"/>
                     </a:lnT>
                     <a:lnB w="9525" cap="flat" cmpd="sng" algn="ctr">
                       <a:solidFill>
-                        <a:srgbClr val="F7D4ED"/>
+                        <a:srgbClr val="FAD1EE"/>
                       </a:solidFill>
                       <a:prstDash val="solid"/>
                     </a:lnB>
@@ -3836,7 +3969,7 @@
                       <a:r>
                         <a:rPr sz="1500" b="1">
                           <a:solidFill>
-                            <a:srgbClr val="721D59"/>
+                            <a:srgbClr val="49273F"/>
                           </a:solidFill>
                         </a:rPr>
                         <a:t>키 · 몸무게</a:t>
@@ -3846,30 +3979,30 @@
                   <a:tcPr anchor="ctr" marL="73152" marR="73152">
                     <a:lnL w="9525" cap="flat" cmpd="sng" algn="ctr">
                       <a:solidFill>
-                        <a:srgbClr val="F7D4ED"/>
+                        <a:srgbClr val="FAD1EE"/>
                       </a:solidFill>
                       <a:prstDash val="solid"/>
                     </a:lnL>
                     <a:lnR w="9525" cap="flat" cmpd="sng" algn="ctr">
                       <a:solidFill>
-                        <a:srgbClr val="F7D4ED"/>
+                        <a:srgbClr val="FAD1EE"/>
                       </a:solidFill>
                       <a:prstDash val="solid"/>
                     </a:lnR>
                     <a:lnT w="9525" cap="flat" cmpd="sng" algn="ctr">
                       <a:solidFill>
-                        <a:srgbClr val="F7D4ED"/>
+                        <a:srgbClr val="FAD1EE"/>
                       </a:solidFill>
                       <a:prstDash val="solid"/>
                     </a:lnT>
                     <a:lnB w="9525" cap="flat" cmpd="sng" algn="ctr">
                       <a:solidFill>
-                        <a:srgbClr val="F7D4ED"/>
+                        <a:srgbClr val="FAD1EE"/>
                       </a:solidFill>
                       <a:prstDash val="solid"/>
                     </a:lnB>
                     <a:solidFill>
-                      <a:srgbClr val="F7D4ED"/>
+                      <a:srgbClr val="FAD1EE"/>
                     </a:solidFill>
                   </a:tcPr>
                 </a:tc>
@@ -3882,7 +4015,7 @@
                       <a:r>
                         <a:rPr sz="1500" b="0">
                           <a:solidFill>
-                            <a:srgbClr val="2B2B2B"/>
+                            <a:srgbClr val="26231F"/>
                           </a:solidFill>
                         </a:rPr>
                         <a:t>입력하세요</a:t>
@@ -3892,30 +4025,30 @@
                   <a:tcPr anchor="ctr" marL="73152" marR="73152">
                     <a:lnL w="9525" cap="flat" cmpd="sng" algn="ctr">
                       <a:solidFill>
-                        <a:srgbClr val="F7D4ED"/>
+                        <a:srgbClr val="FAD1EE"/>
                       </a:solidFill>
                       <a:prstDash val="solid"/>
                     </a:lnL>
                     <a:lnR w="9525" cap="flat" cmpd="sng" algn="ctr">
                       <a:solidFill>
-                        <a:srgbClr val="F7D4ED"/>
+                        <a:srgbClr val="FAD1EE"/>
                       </a:solidFill>
                       <a:prstDash val="solid"/>
                     </a:lnR>
                     <a:lnT w="9525" cap="flat" cmpd="sng" algn="ctr">
                       <a:solidFill>
-                        <a:srgbClr val="F7D4ED"/>
+                        <a:srgbClr val="FAD1EE"/>
                       </a:solidFill>
                       <a:prstDash val="solid"/>
                     </a:lnT>
                     <a:lnB w="9525" cap="flat" cmpd="sng" algn="ctr">
                       <a:solidFill>
-                        <a:srgbClr val="F7D4ED"/>
+                        <a:srgbClr val="FAD1EE"/>
                       </a:solidFill>
                       <a:prstDash val="solid"/>
                     </a:lnB>
                     <a:solidFill>
-                      <a:srgbClr val="FCF3F9"/>
+                      <a:srgbClr val="FDEAF7"/>
                     </a:solidFill>
                   </a:tcPr>
                 </a:tc>
@@ -3930,7 +4063,7 @@
                       <a:r>
                         <a:rPr sz="1500" b="1">
                           <a:solidFill>
-                            <a:srgbClr val="721D59"/>
+                            <a:srgbClr val="49273F"/>
                           </a:solidFill>
                         </a:rPr>
                         <a:t>좋아하는 것</a:t>
@@ -3940,30 +4073,30 @@
                   <a:tcPr anchor="ctr" marL="73152" marR="73152">
                     <a:lnL w="9525" cap="flat" cmpd="sng" algn="ctr">
                       <a:solidFill>
-                        <a:srgbClr val="F7D4ED"/>
+                        <a:srgbClr val="FAD1EE"/>
                       </a:solidFill>
                       <a:prstDash val="solid"/>
                     </a:lnL>
                     <a:lnR w="9525" cap="flat" cmpd="sng" algn="ctr">
                       <a:solidFill>
-                        <a:srgbClr val="F7D4ED"/>
+                        <a:srgbClr val="FAD1EE"/>
                       </a:solidFill>
                       <a:prstDash val="solid"/>
                     </a:lnR>
                     <a:lnT w="9525" cap="flat" cmpd="sng" algn="ctr">
                       <a:solidFill>
-                        <a:srgbClr val="F7D4ED"/>
+                        <a:srgbClr val="FAD1EE"/>
                       </a:solidFill>
                       <a:prstDash val="solid"/>
                     </a:lnT>
                     <a:lnB w="9525" cap="flat" cmpd="sng" algn="ctr">
                       <a:solidFill>
-                        <a:srgbClr val="F7D4ED"/>
+                        <a:srgbClr val="FAD1EE"/>
                       </a:solidFill>
                       <a:prstDash val="solid"/>
                     </a:lnB>
                     <a:solidFill>
-                      <a:srgbClr val="F7D4ED"/>
+                      <a:srgbClr val="FAD1EE"/>
                     </a:solidFill>
                   </a:tcPr>
                 </a:tc>
@@ -3976,7 +4109,7 @@
                       <a:r>
                         <a:rPr sz="1500" b="0">
                           <a:solidFill>
-                            <a:srgbClr val="2B2B2B"/>
+                            <a:srgbClr val="26231F"/>
                           </a:solidFill>
                         </a:rPr>
                         <a:t>입력하세요</a:t>
@@ -3986,25 +4119,25 @@
                   <a:tcPr anchor="ctr" marL="73152" marR="73152">
                     <a:lnL w="9525" cap="flat" cmpd="sng" algn="ctr">
                       <a:solidFill>
-                        <a:srgbClr val="F7D4ED"/>
+                        <a:srgbClr val="FAD1EE"/>
                       </a:solidFill>
                       <a:prstDash val="solid"/>
                     </a:lnL>
                     <a:lnR w="9525" cap="flat" cmpd="sng" algn="ctr">
                       <a:solidFill>
-                        <a:srgbClr val="F7D4ED"/>
+                        <a:srgbClr val="FAD1EE"/>
                       </a:solidFill>
                       <a:prstDash val="solid"/>
                     </a:lnR>
                     <a:lnT w="9525" cap="flat" cmpd="sng" algn="ctr">
                       <a:solidFill>
-                        <a:srgbClr val="F7D4ED"/>
+                        <a:srgbClr val="FAD1EE"/>
                       </a:solidFill>
                       <a:prstDash val="solid"/>
                     </a:lnT>
                     <a:lnB w="9525" cap="flat" cmpd="sng" algn="ctr">
                       <a:solidFill>
-                        <a:srgbClr val="F7D4ED"/>
+                        <a:srgbClr val="FAD1EE"/>
                       </a:solidFill>
                       <a:prstDash val="solid"/>
                     </a:lnB>
@@ -4024,7 +4157,7 @@
                       <a:r>
                         <a:rPr sz="1500" b="1">
                           <a:solidFill>
-                            <a:srgbClr val="721D59"/>
+                            <a:srgbClr val="49273F"/>
                           </a:solidFill>
                         </a:rPr>
                         <a:t>별명</a:t>
@@ -4034,30 +4167,30 @@
                   <a:tcPr anchor="ctr" marL="73152" marR="73152">
                     <a:lnL w="9525" cap="flat" cmpd="sng" algn="ctr">
                       <a:solidFill>
-                        <a:srgbClr val="F7D4ED"/>
+                        <a:srgbClr val="FAD1EE"/>
                       </a:solidFill>
                       <a:prstDash val="solid"/>
                     </a:lnL>
                     <a:lnR w="9525" cap="flat" cmpd="sng" algn="ctr">
                       <a:solidFill>
-                        <a:srgbClr val="F7D4ED"/>
+                        <a:srgbClr val="FAD1EE"/>
                       </a:solidFill>
                       <a:prstDash val="solid"/>
                     </a:lnR>
                     <a:lnT w="9525" cap="flat" cmpd="sng" algn="ctr">
                       <a:solidFill>
-                        <a:srgbClr val="F7D4ED"/>
+                        <a:srgbClr val="FAD1EE"/>
                       </a:solidFill>
                       <a:prstDash val="solid"/>
                     </a:lnT>
                     <a:lnB w="9525" cap="flat" cmpd="sng" algn="ctr">
                       <a:solidFill>
-                        <a:srgbClr val="F7D4ED"/>
+                        <a:srgbClr val="FAD1EE"/>
                       </a:solidFill>
                       <a:prstDash val="solid"/>
                     </a:lnB>
                     <a:solidFill>
-                      <a:srgbClr val="F7D4ED"/>
+                      <a:srgbClr val="FAD1EE"/>
                     </a:solidFill>
                   </a:tcPr>
                 </a:tc>
@@ -4070,7 +4203,7 @@
                       <a:r>
                         <a:rPr sz="1500" b="0">
                           <a:solidFill>
-                            <a:srgbClr val="2B2B2B"/>
+                            <a:srgbClr val="26231F"/>
                           </a:solidFill>
                         </a:rPr>
                         <a:t>입력하세요</a:t>
@@ -4080,30 +4213,30 @@
                   <a:tcPr anchor="ctr" marL="73152" marR="73152">
                     <a:lnL w="9525" cap="flat" cmpd="sng" algn="ctr">
                       <a:solidFill>
-                        <a:srgbClr val="F7D4ED"/>
+                        <a:srgbClr val="FAD1EE"/>
                       </a:solidFill>
                       <a:prstDash val="solid"/>
                     </a:lnL>
                     <a:lnR w="9525" cap="flat" cmpd="sng" algn="ctr">
                       <a:solidFill>
-                        <a:srgbClr val="F7D4ED"/>
+                        <a:srgbClr val="FAD1EE"/>
                       </a:solidFill>
                       <a:prstDash val="solid"/>
                     </a:lnR>
                     <a:lnT w="9525" cap="flat" cmpd="sng" algn="ctr">
                       <a:solidFill>
-                        <a:srgbClr val="F7D4ED"/>
+                        <a:srgbClr val="FAD1EE"/>
                       </a:solidFill>
                       <a:prstDash val="solid"/>
                     </a:lnT>
                     <a:lnB w="9525" cap="flat" cmpd="sng" algn="ctr">
                       <a:solidFill>
-                        <a:srgbClr val="F7D4ED"/>
+                        <a:srgbClr val="FAD1EE"/>
                       </a:solidFill>
                       <a:prstDash val="solid"/>
                     </a:lnB>
                     <a:solidFill>
-                      <a:srgbClr val="FCF3F9"/>
+                      <a:srgbClr val="FDEAF7"/>
                     </a:solidFill>
                   </a:tcPr>
                 </a:tc>
@@ -4118,7 +4251,7 @@
                       <a:r>
                         <a:rPr sz="1500" b="1">
                           <a:solidFill>
-                            <a:srgbClr val="721D59"/>
+                            <a:srgbClr val="49273F"/>
                           </a:solidFill>
                         </a:rPr>
                         <a:t>부모의 마음</a:t>
@@ -4128,30 +4261,30 @@
                   <a:tcPr anchor="ctr" marL="73152" marR="73152">
                     <a:lnL w="9525" cap="flat" cmpd="sng" algn="ctr">
                       <a:solidFill>
-                        <a:srgbClr val="F7D4ED"/>
+                        <a:srgbClr val="FAD1EE"/>
                       </a:solidFill>
                       <a:prstDash val="solid"/>
                     </a:lnL>
                     <a:lnR w="9525" cap="flat" cmpd="sng" algn="ctr">
                       <a:solidFill>
-                        <a:srgbClr val="F7D4ED"/>
+                        <a:srgbClr val="FAD1EE"/>
                       </a:solidFill>
                       <a:prstDash val="solid"/>
                     </a:lnR>
                     <a:lnT w="9525" cap="flat" cmpd="sng" algn="ctr">
                       <a:solidFill>
-                        <a:srgbClr val="F7D4ED"/>
+                        <a:srgbClr val="FAD1EE"/>
                       </a:solidFill>
                       <a:prstDash val="solid"/>
                     </a:lnT>
                     <a:lnB w="9525" cap="flat" cmpd="sng" algn="ctr">
                       <a:solidFill>
-                        <a:srgbClr val="F7D4ED"/>
+                        <a:srgbClr val="FAD1EE"/>
                       </a:solidFill>
                       <a:prstDash val="solid"/>
                     </a:lnB>
                     <a:solidFill>
-                      <a:srgbClr val="F7D4ED"/>
+                      <a:srgbClr val="FAD1EE"/>
                     </a:solidFill>
                   </a:tcPr>
                 </a:tc>
@@ -4164,7 +4297,7 @@
                       <a:r>
                         <a:rPr sz="1500" b="0">
                           <a:solidFill>
-                            <a:srgbClr val="2B2B2B"/>
+                            <a:srgbClr val="26231F"/>
                           </a:solidFill>
                         </a:rPr>
                         <a:t>입력하세요</a:t>
@@ -4174,25 +4307,25 @@
                   <a:tcPr anchor="ctr" marL="73152" marR="73152">
                     <a:lnL w="9525" cap="flat" cmpd="sng" algn="ctr">
                       <a:solidFill>
-                        <a:srgbClr val="F7D4ED"/>
+                        <a:srgbClr val="FAD1EE"/>
                       </a:solidFill>
                       <a:prstDash val="solid"/>
                     </a:lnL>
                     <a:lnR w="9525" cap="flat" cmpd="sng" algn="ctr">
                       <a:solidFill>
-                        <a:srgbClr val="F7D4ED"/>
+                        <a:srgbClr val="FAD1EE"/>
                       </a:solidFill>
                       <a:prstDash val="solid"/>
                     </a:lnR>
                     <a:lnT w="9525" cap="flat" cmpd="sng" algn="ctr">
                       <a:solidFill>
-                        <a:srgbClr val="F7D4ED"/>
+                        <a:srgbClr val="FAD1EE"/>
                       </a:solidFill>
                       <a:prstDash val="solid"/>
                     </a:lnT>
                     <a:lnB w="9525" cap="flat" cmpd="sng" algn="ctr">
                       <a:solidFill>
-                        <a:srgbClr val="F7D4ED"/>
+                        <a:srgbClr val="FAD1EE"/>
                       </a:solidFill>
                       <a:prstDash val="solid"/>
                     </a:lnB>
@@ -4220,7 +4353,7 @@
     <p:bg>
       <p:bgPr>
         <a:solidFill>
-          <a:srgbClr val="FFFFFF"/>
+          <a:srgbClr val="FDFAFC"/>
         </a:solidFill>
         <a:effectLst/>
       </p:bgPr>
@@ -4240,14 +4373,14 @@
         </p:nvSpPr>
         <p:spPr>
           <a:xfrm>
-            <a:off x="-182880" y="6144768"/>
-            <a:ext cx="12557455" cy="731520"/>
-          </a:xfrm>
-          <a:prstGeom prst="wave">
+            <a:off x="640080" y="566928"/>
+            <a:ext cx="10911535" cy="10972"/>
+          </a:xfrm>
+          <a:prstGeom prst="rect">
             <a:avLst/>
           </a:prstGeom>
           <a:solidFill>
-            <a:srgbClr val="F7D4ED"/>
+            <a:srgbClr val="26231F"/>
           </a:solidFill>
           <a:ln>
             <a:noFill/>
@@ -4263,20 +4396,58 @@
       </p:sp>
       <p:sp>
         <p:nvSpPr>
-          <p:cNvPr id="4" name="장식"/>
+          <p:cNvPr id="4" name="상단 라벨"/>
+          <p:cNvSpPr txBox="1"/>
+          <p:nvPr/>
+        </p:nvSpPr>
+        <p:spPr>
+          <a:xfrm>
+            <a:off x="640080" y="237744"/>
+            <a:ext cx="5486400" cy="274320"/>
+          </a:xfrm>
+          <a:prstGeom prst="rect">
+            <a:avLst/>
+          </a:prstGeom>
+          <a:noFill/>
+        </p:spPr>
+        <p:txBody>
+          <a:bodyPr wrap="square" lIns="54864" rIns="54864" tIns="27432" bIns="27432" anchor="ctr">
+            <a:noAutofit/>
+          </a:bodyPr>
+          <a:lstStyle/>
+          <a:p>
+            <a:pPr algn="l">
+              <a:lnSpc>
+                <a:spcPct val="115000"/>
+              </a:lnSpc>
+            </a:pPr>
+            <a:r>
+              <a:rPr sz="900" b="1" i="0" spc="250">
+                <a:solidFill>
+                  <a:srgbClr val="26231F"/>
+                </a:solidFill>
+              </a:rPr>
+              <a:t>FIRST BIRTHDAY</a:t>
+            </a:r>
+          </a:p>
+        </p:txBody>
+      </p:sp>
+      <p:sp>
+        <p:nvSpPr>
+          <p:cNvPr id="5" name="포인트"/>
           <p:cNvSpPr/>
           <p:nvPr/>
         </p:nvSpPr>
         <p:spPr>
           <a:xfrm>
-            <a:off x="-182880" y="6400800"/>
-            <a:ext cx="12557455" cy="502920"/>
-          </a:xfrm>
-          <a:prstGeom prst="wave">
+            <a:off x="11204143" y="246888"/>
+            <a:ext cx="237744" cy="237744"/>
+          </a:xfrm>
+          <a:prstGeom prst="sun">
             <a:avLst/>
           </a:prstGeom>
           <a:solidFill>
-            <a:srgbClr val="D345A9"/>
+            <a:srgbClr val="ED97D3"/>
           </a:solidFill>
           <a:ln>
             <a:noFill/>
@@ -4302,8 +4473,8 @@
         </p:nvSpPr>
         <p:spPr>
           <a:xfrm>
-            <a:off x="640080" y="457200"/>
-            <a:ext cx="9722815" cy="868680"/>
+            <a:off x="640080" y="731520"/>
+            <a:ext cx="10911535" cy="822960"/>
           </a:xfrm>
         </p:spPr>
         <p:txBody>
@@ -4320,7 +4491,7 @@
             <a:r>
               <a:rPr sz="3000" b="1" i="0">
                 <a:solidFill>
-                  <a:srgbClr val="721D59"/>
+                  <a:srgbClr val="26231F"/>
                 </a:solidFill>
               </a:rPr>
               <a:t>돌잡이 이야기</a:t>
@@ -4330,27 +4501,25 @@
       </p:sp>
       <p:sp>
         <p:nvSpPr>
-          <p:cNvPr id="5" name="카드 1"/>
+          <p:cNvPr id="6" name="카드 1"/>
           <p:cNvSpPr/>
           <p:nvPr/>
         </p:nvSpPr>
         <p:spPr>
           <a:xfrm>
-            <a:off x="640080" y="1554480"/>
-            <a:ext cx="2556433" cy="4389120"/>
+            <a:off x="640080" y="1783080"/>
+            <a:ext cx="2556433" cy="4572000"/>
           </a:xfrm>
           <a:prstGeom prst="roundRect">
             <a:avLst>
-              <a:gd name="adj" fmla="val 8000"/>
+              <a:gd name="adj" fmla="val 7000"/>
             </a:avLst>
           </a:prstGeom>
           <a:solidFill>
-            <a:srgbClr val="FCF3F9"/>
+            <a:srgbClr val="FDEAF7"/>
           </a:solidFill>
-          <a:ln w="15875">
-            <a:solidFill>
-              <a:srgbClr val="F7D4ED"/>
-            </a:solidFill>
+          <a:ln>
+            <a:noFill/>
           </a:ln>
         </p:spPr>
         <p:txBody>
@@ -4363,20 +4532,20 @@
       </p:sp>
       <p:sp>
         <p:nvSpPr>
-          <p:cNvPr id="6" name="번호 1"/>
+          <p:cNvPr id="7" name="번호 1"/>
           <p:cNvSpPr/>
           <p:nvPr/>
         </p:nvSpPr>
         <p:spPr>
           <a:xfrm>
-            <a:off x="822959" y="1737360"/>
+            <a:off x="822959" y="1965960"/>
             <a:ext cx="457200" cy="457200"/>
           </a:xfrm>
           <a:prstGeom prst="ellipse">
             <a:avLst/>
           </a:prstGeom>
           <a:solidFill>
-            <a:srgbClr val="D345A9"/>
+            <a:srgbClr val="ED97D3"/>
           </a:solidFill>
           <a:ln>
             <a:noFill/>
@@ -4396,7 +4565,7 @@
             <a:r>
               <a:rPr sz="1600" b="1" i="0">
                 <a:solidFill>
-                  <a:srgbClr val="FFFFFF"/>
+                  <a:srgbClr val="26231F"/>
                 </a:solidFill>
               </a:rPr>
               <a:t>1</a:t>
@@ -4406,13 +4575,13 @@
       </p:sp>
       <p:sp>
         <p:nvSpPr>
-          <p:cNvPr id="7" name="TextBox 6"/>
+          <p:cNvPr id="8" name="TextBox 7"/>
           <p:cNvSpPr txBox="1"/>
           <p:nvPr/>
         </p:nvSpPr>
         <p:spPr>
           <a:xfrm>
-            <a:off x="777240" y="2331720"/>
+            <a:off x="777240" y="2560320"/>
             <a:ext cx="2282113" cy="640080"/>
           </a:xfrm>
           <a:prstGeom prst="rect">
@@ -4434,7 +4603,7 @@
             <a:r>
               <a:rPr sz="1600" b="1" i="0">
                 <a:solidFill>
-                  <a:srgbClr val="721D59"/>
+                  <a:srgbClr val="49273F"/>
                 </a:solidFill>
               </a:rPr>
               <a:t>연필 · 공부</a:t>
@@ -4444,14 +4613,14 @@
       </p:sp>
       <p:sp>
         <p:nvSpPr>
-          <p:cNvPr id="8" name="TextBox 7"/>
+          <p:cNvPr id="9" name="TextBox 8"/>
           <p:cNvSpPr txBox="1"/>
           <p:nvPr/>
         </p:nvSpPr>
         <p:spPr>
           <a:xfrm>
-            <a:off x="777240" y="3017520"/>
-            <a:ext cx="2282113" cy="2788920"/>
+            <a:off x="777240" y="3246120"/>
+            <a:ext cx="2282113" cy="2971800"/>
           </a:xfrm>
           <a:prstGeom prst="rect">
             <a:avLst/>
@@ -4472,7 +4641,7 @@
             <a:r>
               <a:rPr sz="1400" b="0" i="0">
                 <a:solidFill>
-                  <a:srgbClr val="2B2B2B"/>
+                  <a:srgbClr val="26231F"/>
                 </a:solidFill>
               </a:rPr>
               <a:t>학문과 총명을 바라는 마음</a:t>
@@ -4482,27 +4651,25 @@
       </p:sp>
       <p:sp>
         <p:nvSpPr>
-          <p:cNvPr id="9" name="카드 2"/>
+          <p:cNvPr id="10" name="카드 2"/>
           <p:cNvSpPr/>
           <p:nvPr/>
         </p:nvSpPr>
         <p:spPr>
           <a:xfrm>
-            <a:off x="3425113" y="1554480"/>
-            <a:ext cx="2556433" cy="4389120"/>
+            <a:off x="3425113" y="1783080"/>
+            <a:ext cx="2556433" cy="4572000"/>
           </a:xfrm>
           <a:prstGeom prst="roundRect">
             <a:avLst>
-              <a:gd name="adj" fmla="val 8000"/>
+              <a:gd name="adj" fmla="val 7000"/>
             </a:avLst>
           </a:prstGeom>
           <a:solidFill>
-            <a:srgbClr val="FCF3F9"/>
+            <a:srgbClr val="FDEAF7"/>
           </a:solidFill>
-          <a:ln w="15875">
-            <a:solidFill>
-              <a:srgbClr val="F7D4ED"/>
-            </a:solidFill>
+          <a:ln>
+            <a:noFill/>
           </a:ln>
         </p:spPr>
         <p:txBody>
@@ -4515,20 +4682,20 @@
       </p:sp>
       <p:sp>
         <p:nvSpPr>
-          <p:cNvPr id="10" name="번호 2"/>
+          <p:cNvPr id="11" name="번호 2"/>
           <p:cNvSpPr/>
           <p:nvPr/>
         </p:nvSpPr>
         <p:spPr>
           <a:xfrm>
-            <a:off x="3607993" y="1737360"/>
+            <a:off x="3607993" y="1965960"/>
             <a:ext cx="457200" cy="457200"/>
           </a:xfrm>
           <a:prstGeom prst="ellipse">
             <a:avLst/>
           </a:prstGeom>
           <a:solidFill>
-            <a:srgbClr val="D345A9"/>
+            <a:srgbClr val="ED97D3"/>
           </a:solidFill>
           <a:ln>
             <a:noFill/>
@@ -4548,7 +4715,7 @@
             <a:r>
               <a:rPr sz="1600" b="1" i="0">
                 <a:solidFill>
-                  <a:srgbClr val="FFFFFF"/>
+                  <a:srgbClr val="26231F"/>
                 </a:solidFill>
               </a:rPr>
               <a:t>2</a:t>
@@ -4558,13 +4725,13 @@
       </p:sp>
       <p:sp>
         <p:nvSpPr>
-          <p:cNvPr id="11" name="TextBox 10"/>
+          <p:cNvPr id="12" name="TextBox 11"/>
           <p:cNvSpPr txBox="1"/>
           <p:nvPr/>
         </p:nvSpPr>
         <p:spPr>
           <a:xfrm>
-            <a:off x="3562273" y="2331720"/>
+            <a:off x="3562273" y="2560320"/>
             <a:ext cx="2282113" cy="640080"/>
           </a:xfrm>
           <a:prstGeom prst="rect">
@@ -4586,7 +4753,7 @@
             <a:r>
               <a:rPr sz="1600" b="1" i="0">
                 <a:solidFill>
-                  <a:srgbClr val="721D59"/>
+                  <a:srgbClr val="49273F"/>
                 </a:solidFill>
               </a:rPr>
               <a:t>실 · 장수</a:t>
@@ -4596,14 +4763,14 @@
       </p:sp>
       <p:sp>
         <p:nvSpPr>
-          <p:cNvPr id="12" name="TextBox 11"/>
+          <p:cNvPr id="13" name="TextBox 12"/>
           <p:cNvSpPr txBox="1"/>
           <p:nvPr/>
         </p:nvSpPr>
         <p:spPr>
           <a:xfrm>
-            <a:off x="3562273" y="3017520"/>
-            <a:ext cx="2282113" cy="2788920"/>
+            <a:off x="3562273" y="3246120"/>
+            <a:ext cx="2282113" cy="2971800"/>
           </a:xfrm>
           <a:prstGeom prst="rect">
             <a:avLst/>
@@ -4624,7 +4791,7 @@
             <a:r>
               <a:rPr sz="1400" b="0" i="0">
                 <a:solidFill>
-                  <a:srgbClr val="2B2B2B"/>
+                  <a:srgbClr val="26231F"/>
                 </a:solidFill>
               </a:rPr>
               <a:t>건강하고 오래 살기를</a:t>
@@ -4634,27 +4801,25 @@
       </p:sp>
       <p:sp>
         <p:nvSpPr>
-          <p:cNvPr id="13" name="카드 3"/>
+          <p:cNvPr id="14" name="카드 3"/>
           <p:cNvSpPr/>
           <p:nvPr/>
         </p:nvSpPr>
         <p:spPr>
           <a:xfrm>
-            <a:off x="6210147" y="1554480"/>
-            <a:ext cx="2556433" cy="4389120"/>
+            <a:off x="6210147" y="1783080"/>
+            <a:ext cx="2556433" cy="4572000"/>
           </a:xfrm>
           <a:prstGeom prst="roundRect">
             <a:avLst>
-              <a:gd name="adj" fmla="val 8000"/>
+              <a:gd name="adj" fmla="val 7000"/>
             </a:avLst>
           </a:prstGeom>
           <a:solidFill>
-            <a:srgbClr val="FCF3F9"/>
+            <a:srgbClr val="FDEAF7"/>
           </a:solidFill>
-          <a:ln w="15875">
-            <a:solidFill>
-              <a:srgbClr val="F7D4ED"/>
-            </a:solidFill>
+          <a:ln>
+            <a:noFill/>
           </a:ln>
         </p:spPr>
         <p:txBody>
@@ -4667,20 +4832,20 @@
       </p:sp>
       <p:sp>
         <p:nvSpPr>
-          <p:cNvPr id="14" name="번호 3"/>
+          <p:cNvPr id="15" name="번호 3"/>
           <p:cNvSpPr/>
           <p:nvPr/>
         </p:nvSpPr>
         <p:spPr>
           <a:xfrm>
-            <a:off x="6393027" y="1737360"/>
+            <a:off x="6393027" y="1965960"/>
             <a:ext cx="457200" cy="457200"/>
           </a:xfrm>
           <a:prstGeom prst="ellipse">
             <a:avLst/>
           </a:prstGeom>
           <a:solidFill>
-            <a:srgbClr val="D345A9"/>
+            <a:srgbClr val="ED97D3"/>
           </a:solidFill>
           <a:ln>
             <a:noFill/>
@@ -4700,7 +4865,7 @@
             <a:r>
               <a:rPr sz="1600" b="1" i="0">
                 <a:solidFill>
-                  <a:srgbClr val="FFFFFF"/>
+                  <a:srgbClr val="26231F"/>
                 </a:solidFill>
               </a:rPr>
               <a:t>3</a:t>
@@ -4710,13 +4875,13 @@
       </p:sp>
       <p:sp>
         <p:nvSpPr>
-          <p:cNvPr id="15" name="TextBox 14"/>
+          <p:cNvPr id="16" name="TextBox 15"/>
           <p:cNvSpPr txBox="1"/>
           <p:nvPr/>
         </p:nvSpPr>
         <p:spPr>
           <a:xfrm>
-            <a:off x="6347307" y="2331720"/>
+            <a:off x="6347307" y="2560320"/>
             <a:ext cx="2282113" cy="640080"/>
           </a:xfrm>
           <a:prstGeom prst="rect">
@@ -4738,7 +4903,7 @@
             <a:r>
               <a:rPr sz="1600" b="1" i="0">
                 <a:solidFill>
-                  <a:srgbClr val="721D59"/>
+                  <a:srgbClr val="49273F"/>
                 </a:solidFill>
               </a:rPr>
               <a:t>돈 · 부</a:t>
@@ -4748,14 +4913,14 @@
       </p:sp>
       <p:sp>
         <p:nvSpPr>
-          <p:cNvPr id="16" name="TextBox 15"/>
+          <p:cNvPr id="17" name="TextBox 16"/>
           <p:cNvSpPr txBox="1"/>
           <p:nvPr/>
         </p:nvSpPr>
         <p:spPr>
           <a:xfrm>
-            <a:off x="6347307" y="3017520"/>
-            <a:ext cx="2282113" cy="2788920"/>
+            <a:off x="6347307" y="3246120"/>
+            <a:ext cx="2282113" cy="2971800"/>
           </a:xfrm>
           <a:prstGeom prst="rect">
             <a:avLst/>
@@ -4776,7 +4941,7 @@
             <a:r>
               <a:rPr sz="1400" b="0" i="0">
                 <a:solidFill>
-                  <a:srgbClr val="2B2B2B"/>
+                  <a:srgbClr val="26231F"/>
                 </a:solidFill>
               </a:rPr>
               <a:t>넉넉한 삶을 바라는 마음</a:t>
@@ -4786,27 +4951,25 @@
       </p:sp>
       <p:sp>
         <p:nvSpPr>
-          <p:cNvPr id="17" name="카드 4"/>
+          <p:cNvPr id="18" name="카드 4"/>
           <p:cNvSpPr/>
           <p:nvPr/>
         </p:nvSpPr>
         <p:spPr>
           <a:xfrm>
-            <a:off x="8995181" y="1554480"/>
-            <a:ext cx="2556433" cy="4389120"/>
+            <a:off x="8995181" y="1783080"/>
+            <a:ext cx="2556433" cy="4572000"/>
           </a:xfrm>
           <a:prstGeom prst="roundRect">
             <a:avLst>
-              <a:gd name="adj" fmla="val 8000"/>
+              <a:gd name="adj" fmla="val 7000"/>
             </a:avLst>
           </a:prstGeom>
           <a:solidFill>
-            <a:srgbClr val="FCF3F9"/>
+            <a:srgbClr val="FDEAF7"/>
           </a:solidFill>
-          <a:ln w="15875">
-            <a:solidFill>
-              <a:srgbClr val="F7D4ED"/>
-            </a:solidFill>
+          <a:ln>
+            <a:noFill/>
           </a:ln>
         </p:spPr>
         <p:txBody>
@@ -4819,20 +4982,20 @@
       </p:sp>
       <p:sp>
         <p:nvSpPr>
-          <p:cNvPr id="18" name="번호 4"/>
+          <p:cNvPr id="19" name="번호 4"/>
           <p:cNvSpPr/>
           <p:nvPr/>
         </p:nvSpPr>
         <p:spPr>
           <a:xfrm>
-            <a:off x="9178061" y="1737360"/>
+            <a:off x="9178061" y="1965960"/>
             <a:ext cx="457200" cy="457200"/>
           </a:xfrm>
           <a:prstGeom prst="ellipse">
             <a:avLst/>
           </a:prstGeom>
           <a:solidFill>
-            <a:srgbClr val="D345A9"/>
+            <a:srgbClr val="ED97D3"/>
           </a:solidFill>
           <a:ln>
             <a:noFill/>
@@ -4852,7 +5015,7 @@
             <a:r>
               <a:rPr sz="1600" b="1" i="0">
                 <a:solidFill>
-                  <a:srgbClr val="FFFFFF"/>
+                  <a:srgbClr val="26231F"/>
                 </a:solidFill>
               </a:rPr>
               <a:t>4</a:t>
@@ -4862,13 +5025,13 @@
       </p:sp>
       <p:sp>
         <p:nvSpPr>
-          <p:cNvPr id="19" name="TextBox 18"/>
+          <p:cNvPr id="20" name="TextBox 19"/>
           <p:cNvSpPr txBox="1"/>
           <p:nvPr/>
         </p:nvSpPr>
         <p:spPr>
           <a:xfrm>
-            <a:off x="9132341" y="2331720"/>
+            <a:off x="9132341" y="2560320"/>
             <a:ext cx="2282113" cy="640080"/>
           </a:xfrm>
           <a:prstGeom prst="rect">
@@ -4890,7 +5053,7 @@
             <a:r>
               <a:rPr sz="1600" b="1" i="0">
                 <a:solidFill>
-                  <a:srgbClr val="721D59"/>
+                  <a:srgbClr val="49273F"/>
                 </a:solidFill>
               </a:rPr>
               <a:t>마이크 · 인기</a:t>
@@ -4900,14 +5063,14 @@
       </p:sp>
       <p:sp>
         <p:nvSpPr>
-          <p:cNvPr id="20" name="TextBox 19"/>
+          <p:cNvPr id="21" name="TextBox 20"/>
           <p:cNvSpPr txBox="1"/>
           <p:nvPr/>
         </p:nvSpPr>
         <p:spPr>
           <a:xfrm>
-            <a:off x="9132341" y="3017520"/>
-            <a:ext cx="2282113" cy="2788920"/>
+            <a:off x="9132341" y="3246120"/>
+            <a:ext cx="2282113" cy="2971800"/>
           </a:xfrm>
           <a:prstGeom prst="rect">
             <a:avLst/>
@@ -4928,7 +5091,7 @@
             <a:r>
               <a:rPr sz="1400" b="0" i="0">
                 <a:solidFill>
-                  <a:srgbClr val="2B2B2B"/>
+                  <a:srgbClr val="26231F"/>
                 </a:solidFill>
               </a:rPr>
               <a:t>사람들에게 사랑받기를</a:t>
@@ -4950,7 +5113,7 @@
     <p:bg>
       <p:bgPr>
         <a:solidFill>
-          <a:srgbClr val="FFFFFF"/>
+          <a:srgbClr val="FDFAFC"/>
         </a:solidFill>
         <a:effectLst/>
       </p:bgPr>
@@ -4970,14 +5133,14 @@
         </p:nvSpPr>
         <p:spPr>
           <a:xfrm>
-            <a:off x="-182880" y="6144768"/>
-            <a:ext cx="12557455" cy="731520"/>
-          </a:xfrm>
-          <a:prstGeom prst="wave">
+            <a:off x="640080" y="566928"/>
+            <a:ext cx="10911535" cy="10972"/>
+          </a:xfrm>
+          <a:prstGeom prst="rect">
             <a:avLst/>
           </a:prstGeom>
           <a:solidFill>
-            <a:srgbClr val="F7D4ED"/>
+            <a:srgbClr val="26231F"/>
           </a:solidFill>
           <a:ln>
             <a:noFill/>
@@ -4993,20 +5156,58 @@
       </p:sp>
       <p:sp>
         <p:nvSpPr>
-          <p:cNvPr id="4" name="장식"/>
+          <p:cNvPr id="4" name="상단 라벨"/>
+          <p:cNvSpPr txBox="1"/>
+          <p:nvPr/>
+        </p:nvSpPr>
+        <p:spPr>
+          <a:xfrm>
+            <a:off x="640080" y="237744"/>
+            <a:ext cx="5486400" cy="274320"/>
+          </a:xfrm>
+          <a:prstGeom prst="rect">
+            <a:avLst/>
+          </a:prstGeom>
+          <a:noFill/>
+        </p:spPr>
+        <p:txBody>
+          <a:bodyPr wrap="square" lIns="54864" rIns="54864" tIns="27432" bIns="27432" anchor="ctr">
+            <a:noAutofit/>
+          </a:bodyPr>
+          <a:lstStyle/>
+          <a:p>
+            <a:pPr algn="l">
+              <a:lnSpc>
+                <a:spcPct val="115000"/>
+              </a:lnSpc>
+            </a:pPr>
+            <a:r>
+              <a:rPr sz="900" b="1" i="0" spc="250">
+                <a:solidFill>
+                  <a:srgbClr val="26231F"/>
+                </a:solidFill>
+              </a:rPr>
+              <a:t>FIRST BIRTHDAY</a:t>
+            </a:r>
+          </a:p>
+        </p:txBody>
+      </p:sp>
+      <p:sp>
+        <p:nvSpPr>
+          <p:cNvPr id="5" name="포인트"/>
           <p:cNvSpPr/>
           <p:nvPr/>
         </p:nvSpPr>
         <p:spPr>
           <a:xfrm>
-            <a:off x="-182880" y="6400800"/>
-            <a:ext cx="12557455" cy="502920"/>
-          </a:xfrm>
-          <a:prstGeom prst="wave">
+            <a:off x="11204143" y="246888"/>
+            <a:ext cx="237744" cy="237744"/>
+          </a:xfrm>
+          <a:prstGeom prst="sun">
             <a:avLst/>
           </a:prstGeom>
           <a:solidFill>
-            <a:srgbClr val="D345A9"/>
+            <a:srgbClr val="ED97D3"/>
           </a:solidFill>
           <a:ln>
             <a:noFill/>
@@ -5032,8 +5233,8 @@
         </p:nvSpPr>
         <p:spPr>
           <a:xfrm>
-            <a:off x="640080" y="457200"/>
-            <a:ext cx="9722815" cy="868680"/>
+            <a:off x="640080" y="731520"/>
+            <a:ext cx="10911535" cy="822960"/>
           </a:xfrm>
         </p:spPr>
         <p:txBody>
@@ -5050,7 +5251,7 @@
             <a:r>
               <a:rPr sz="3000" b="1" i="0">
                 <a:solidFill>
-                  <a:srgbClr val="721D59"/>
+                  <a:srgbClr val="26231F"/>
                 </a:solidFill>
               </a:rPr>
               <a:t>우리 아기의 선택은?</a:t>
@@ -5060,14 +5261,14 @@
       </p:sp>
       <p:sp>
         <p:nvSpPr>
-          <p:cNvPr id="5" name="사진 자리"/>
+          <p:cNvPr id="6" name="사진 자리"/>
           <p:cNvSpPr/>
           <p:nvPr/>
         </p:nvSpPr>
         <p:spPr>
           <a:xfrm>
-            <a:off x="640080" y="1554480"/>
-            <a:ext cx="4572000" cy="4389120"/>
+            <a:off x="640080" y="1783080"/>
+            <a:ext cx="4572000" cy="4572000"/>
           </a:xfrm>
           <a:prstGeom prst="roundRect">
             <a:avLst>
@@ -5075,12 +5276,10 @@
             </a:avLst>
           </a:prstGeom>
           <a:solidFill>
-            <a:srgbClr val="F7D4ED"/>
+            <a:srgbClr val="FAD1EE"/>
           </a:solidFill>
           <a:ln w="19050">
-            <a:solidFill>
-              <a:srgbClr val="D345A9"/>
-            </a:solidFill>
+            <a:noFill/>
             <a:prstDash val="dash"/>
           </a:ln>
         </p:spPr>
@@ -5098,7 +5297,7 @@
             <a:r>
               <a:rPr sz="1400" b="0" i="0">
                 <a:solidFill>
-                  <a:srgbClr val="721D59"/>
+                  <a:srgbClr val="8E8780"/>
                 </a:solidFill>
               </a:rPr>
               <a:t>돌잡이 사진</a:t>
@@ -5108,27 +5307,25 @@
       </p:sp>
       <p:sp>
         <p:nvSpPr>
-          <p:cNvPr id="6" name="선택 칸"/>
+          <p:cNvPr id="7" name="선택 칸"/>
           <p:cNvSpPr/>
           <p:nvPr/>
         </p:nvSpPr>
         <p:spPr>
           <a:xfrm>
-            <a:off x="5577840" y="1554480"/>
-            <a:ext cx="5973775" cy="4389120"/>
+            <a:off x="5577840" y="1783080"/>
+            <a:ext cx="5973775" cy="4572000"/>
           </a:xfrm>
           <a:prstGeom prst="roundRect">
             <a:avLst>
-              <a:gd name="adj" fmla="val 8000"/>
+              <a:gd name="adj" fmla="val 7000"/>
             </a:avLst>
           </a:prstGeom>
           <a:solidFill>
-            <a:srgbClr val="FCF3F9"/>
+            <a:srgbClr val="FDEAF7"/>
           </a:solidFill>
-          <a:ln w="12700">
-            <a:solidFill>
-              <a:srgbClr val="F7D4ED"/>
-            </a:solidFill>
+          <a:ln>
+            <a:noFill/>
           </a:ln>
         </p:spPr>
         <p:txBody>
@@ -5141,14 +5338,14 @@
       </p:sp>
       <p:sp>
         <p:nvSpPr>
-          <p:cNvPr id="7" name="TextBox 6"/>
+          <p:cNvPr id="8" name="TextBox 7"/>
           <p:cNvSpPr txBox="1"/>
           <p:nvPr/>
         </p:nvSpPr>
         <p:spPr>
           <a:xfrm>
-            <a:off x="5852160" y="1828800"/>
-            <a:ext cx="5425135" cy="3840480"/>
+            <a:off x="5852160" y="2057400"/>
+            <a:ext cx="5425135" cy="4023360"/>
           </a:xfrm>
           <a:prstGeom prst="rect">
             <a:avLst/>
@@ -5169,7 +5366,7 @@
             <a:r>
               <a:rPr sz="1800" b="0" i="0">
                 <a:solidFill>
-                  <a:srgbClr val="2B2B2B"/>
+                  <a:srgbClr val="26231F"/>
                 </a:solidFill>
               </a:rPr>
               <a:t>우리 아기의 선택</a:t>
@@ -5184,7 +5381,7 @@
             <a:r>
               <a:rPr sz="1800" b="0" i="0">
                 <a:solidFill>
-                  <a:srgbClr val="2B2B2B"/>
+                  <a:srgbClr val="26231F"/>
                 </a:solidFill>
               </a:rPr>
               <a:t/>
@@ -5199,7 +5396,7 @@
             <a:r>
               <a:rPr sz="1800" b="0" i="0">
                 <a:solidFill>
-                  <a:srgbClr val="2B2B2B"/>
+                  <a:srgbClr val="26231F"/>
                 </a:solidFill>
               </a:rPr>
               <a:t>무엇을 집었나요?</a:t>
@@ -5214,7 +5411,7 @@
             <a:r>
               <a:rPr sz="1800" b="0" i="0">
                 <a:solidFill>
-                  <a:srgbClr val="2B2B2B"/>
+                  <a:srgbClr val="26231F"/>
                 </a:solidFill>
               </a:rPr>
               <a:t/>
@@ -5229,7 +5426,7 @@
             <a:r>
               <a:rPr sz="1800" b="0" i="0">
                 <a:solidFill>
-                  <a:srgbClr val="2B2B2B"/>
+                  <a:srgbClr val="26231F"/>
                 </a:solidFill>
               </a:rPr>
               <a:t>그때 가족의 반응은?</a:t>
@@ -5251,7 +5448,7 @@
     <p:bg>
       <p:bgPr>
         <a:solidFill>
-          <a:srgbClr val="FFFFFF"/>
+          <a:srgbClr val="FDFAFC"/>
         </a:solidFill>
         <a:effectLst/>
       </p:bgPr>
@@ -5271,14 +5468,14 @@
         </p:nvSpPr>
         <p:spPr>
           <a:xfrm>
-            <a:off x="-182880" y="6144768"/>
-            <a:ext cx="12557455" cy="731520"/>
-          </a:xfrm>
-          <a:prstGeom prst="wave">
+            <a:off x="640080" y="566928"/>
+            <a:ext cx="10911535" cy="10972"/>
+          </a:xfrm>
+          <a:prstGeom prst="rect">
             <a:avLst/>
           </a:prstGeom>
           <a:solidFill>
-            <a:srgbClr val="F7D4ED"/>
+            <a:srgbClr val="26231F"/>
           </a:solidFill>
           <a:ln>
             <a:noFill/>
@@ -5294,20 +5491,58 @@
       </p:sp>
       <p:sp>
         <p:nvSpPr>
-          <p:cNvPr id="4" name="장식"/>
+          <p:cNvPr id="4" name="상단 라벨"/>
+          <p:cNvSpPr txBox="1"/>
+          <p:nvPr/>
+        </p:nvSpPr>
+        <p:spPr>
+          <a:xfrm>
+            <a:off x="640080" y="237744"/>
+            <a:ext cx="5486400" cy="274320"/>
+          </a:xfrm>
+          <a:prstGeom prst="rect">
+            <a:avLst/>
+          </a:prstGeom>
+          <a:noFill/>
+        </p:spPr>
+        <p:txBody>
+          <a:bodyPr wrap="square" lIns="54864" rIns="54864" tIns="27432" bIns="27432" anchor="ctr">
+            <a:noAutofit/>
+          </a:bodyPr>
+          <a:lstStyle/>
+          <a:p>
+            <a:pPr algn="l">
+              <a:lnSpc>
+                <a:spcPct val="115000"/>
+              </a:lnSpc>
+            </a:pPr>
+            <a:r>
+              <a:rPr sz="900" b="1" i="0" spc="250">
+                <a:solidFill>
+                  <a:srgbClr val="26231F"/>
+                </a:solidFill>
+              </a:rPr>
+              <a:t>FIRST BIRTHDAY</a:t>
+            </a:r>
+          </a:p>
+        </p:txBody>
+      </p:sp>
+      <p:sp>
+        <p:nvSpPr>
+          <p:cNvPr id="5" name="포인트"/>
           <p:cNvSpPr/>
           <p:nvPr/>
         </p:nvSpPr>
         <p:spPr>
           <a:xfrm>
-            <a:off x="-182880" y="6400800"/>
-            <a:ext cx="12557455" cy="502920"/>
-          </a:xfrm>
-          <a:prstGeom prst="wave">
+            <a:off x="11204143" y="246888"/>
+            <a:ext cx="237744" cy="237744"/>
+          </a:xfrm>
+          <a:prstGeom prst="sun">
             <a:avLst/>
           </a:prstGeom>
           <a:solidFill>
-            <a:srgbClr val="D345A9"/>
+            <a:srgbClr val="ED97D3"/>
           </a:solidFill>
           <a:ln>
             <a:noFill/>
@@ -5333,8 +5568,8 @@
         </p:nvSpPr>
         <p:spPr>
           <a:xfrm>
-            <a:off x="640080" y="457200"/>
-            <a:ext cx="9722815" cy="868680"/>
+            <a:off x="640080" y="731520"/>
+            <a:ext cx="10911535" cy="822960"/>
           </a:xfrm>
         </p:spPr>
         <p:txBody>
@@ -5351,7 +5586,7 @@
             <a:r>
               <a:rPr sz="3000" b="1" i="0">
                 <a:solidFill>
-                  <a:srgbClr val="721D59"/>
+                  <a:srgbClr val="26231F"/>
                 </a:solidFill>
               </a:rPr>
               <a:t>사진 모음</a:t>
@@ -5361,14 +5596,14 @@
       </p:sp>
       <p:sp>
         <p:nvSpPr>
-          <p:cNvPr id="5" name="사진 자리"/>
+          <p:cNvPr id="6" name="사진 자리"/>
           <p:cNvSpPr/>
           <p:nvPr/>
         </p:nvSpPr>
         <p:spPr>
           <a:xfrm>
-            <a:off x="640080" y="1554480"/>
-            <a:ext cx="2590723" cy="2103120"/>
+            <a:off x="640080" y="1783080"/>
+            <a:ext cx="2590723" cy="2194560"/>
           </a:xfrm>
           <a:prstGeom prst="roundRect">
             <a:avLst>
@@ -5376,12 +5611,10 @@
             </a:avLst>
           </a:prstGeom>
           <a:solidFill>
-            <a:srgbClr val="F7D4ED"/>
+            <a:srgbClr val="FAD1EE"/>
           </a:solidFill>
           <a:ln w="19050">
-            <a:solidFill>
-              <a:srgbClr val="D345A9"/>
-            </a:solidFill>
+            <a:noFill/>
             <a:prstDash val="dash"/>
           </a:ln>
         </p:spPr>
@@ -5399,7 +5632,7 @@
             <a:r>
               <a:rPr sz="1200" b="0" i="0">
                 <a:solidFill>
-                  <a:srgbClr val="721D59"/>
+                  <a:srgbClr val="8E8780"/>
                 </a:solidFill>
               </a:rPr>
               <a:t>사진 1</a:t>
@@ -5409,14 +5642,14 @@
       </p:sp>
       <p:sp>
         <p:nvSpPr>
-          <p:cNvPr id="6" name="사진 자리"/>
+          <p:cNvPr id="7" name="사진 자리"/>
           <p:cNvSpPr/>
           <p:nvPr/>
         </p:nvSpPr>
         <p:spPr>
           <a:xfrm>
-            <a:off x="3413683" y="1554480"/>
-            <a:ext cx="2590723" cy="2103120"/>
+            <a:off x="3413683" y="1783080"/>
+            <a:ext cx="2590723" cy="2194560"/>
           </a:xfrm>
           <a:prstGeom prst="roundRect">
             <a:avLst>
@@ -5424,12 +5657,10 @@
             </a:avLst>
           </a:prstGeom>
           <a:solidFill>
-            <a:srgbClr val="F7D4ED"/>
+            <a:srgbClr val="FAD1EE"/>
           </a:solidFill>
           <a:ln w="19050">
-            <a:solidFill>
-              <a:srgbClr val="D345A9"/>
-            </a:solidFill>
+            <a:noFill/>
             <a:prstDash val="dash"/>
           </a:ln>
         </p:spPr>
@@ -5447,7 +5678,7 @@
             <a:r>
               <a:rPr sz="1200" b="0" i="0">
                 <a:solidFill>
-                  <a:srgbClr val="721D59"/>
+                  <a:srgbClr val="8E8780"/>
                 </a:solidFill>
               </a:rPr>
               <a:t>사진 2</a:t>
@@ -5457,14 +5688,14 @@
       </p:sp>
       <p:sp>
         <p:nvSpPr>
-          <p:cNvPr id="7" name="사진 자리"/>
+          <p:cNvPr id="8" name="사진 자리"/>
           <p:cNvSpPr/>
           <p:nvPr/>
         </p:nvSpPr>
         <p:spPr>
           <a:xfrm>
-            <a:off x="6187287" y="1554480"/>
-            <a:ext cx="2590723" cy="2103120"/>
+            <a:off x="6187287" y="1783080"/>
+            <a:ext cx="2590723" cy="2194560"/>
           </a:xfrm>
           <a:prstGeom prst="roundRect">
             <a:avLst>
@@ -5472,12 +5703,10 @@
             </a:avLst>
           </a:prstGeom>
           <a:solidFill>
-            <a:srgbClr val="F7D4ED"/>
+            <a:srgbClr val="FAD1EE"/>
           </a:solidFill>
           <a:ln w="19050">
-            <a:solidFill>
-              <a:srgbClr val="D345A9"/>
-            </a:solidFill>
+            <a:noFill/>
             <a:prstDash val="dash"/>
           </a:ln>
         </p:spPr>
@@ -5495,7 +5724,7 @@
             <a:r>
               <a:rPr sz="1200" b="0" i="0">
                 <a:solidFill>
-                  <a:srgbClr val="721D59"/>
+                  <a:srgbClr val="8E8780"/>
                 </a:solidFill>
               </a:rPr>
               <a:t>사진 3</a:t>
@@ -5505,14 +5734,14 @@
       </p:sp>
       <p:sp>
         <p:nvSpPr>
-          <p:cNvPr id="8" name="사진 자리"/>
+          <p:cNvPr id="9" name="사진 자리"/>
           <p:cNvSpPr/>
           <p:nvPr/>
         </p:nvSpPr>
         <p:spPr>
           <a:xfrm>
-            <a:off x="8960891" y="1554480"/>
-            <a:ext cx="2590723" cy="2103120"/>
+            <a:off x="8960891" y="1783080"/>
+            <a:ext cx="2590723" cy="2194560"/>
           </a:xfrm>
           <a:prstGeom prst="roundRect">
             <a:avLst>
@@ -5520,12 +5749,10 @@
             </a:avLst>
           </a:prstGeom>
           <a:solidFill>
-            <a:srgbClr val="F7D4ED"/>
+            <a:srgbClr val="FAD1EE"/>
           </a:solidFill>
           <a:ln w="19050">
-            <a:solidFill>
-              <a:srgbClr val="D345A9"/>
-            </a:solidFill>
+            <a:noFill/>
             <a:prstDash val="dash"/>
           </a:ln>
         </p:spPr>
@@ -5543,7 +5770,7 @@
             <a:r>
               <a:rPr sz="1200" b="0" i="0">
                 <a:solidFill>
-                  <a:srgbClr val="721D59"/>
+                  <a:srgbClr val="8E8780"/>
                 </a:solidFill>
               </a:rPr>
               <a:t>사진 4</a:t>
@@ -5553,14 +5780,14 @@
       </p:sp>
       <p:sp>
         <p:nvSpPr>
-          <p:cNvPr id="9" name="사진 자리"/>
+          <p:cNvPr id="10" name="사진 자리"/>
           <p:cNvSpPr/>
           <p:nvPr/>
         </p:nvSpPr>
         <p:spPr>
           <a:xfrm>
-            <a:off x="640080" y="3840480"/>
-            <a:ext cx="2590723" cy="2103120"/>
+            <a:off x="640080" y="4160520"/>
+            <a:ext cx="2590723" cy="2194560"/>
           </a:xfrm>
           <a:prstGeom prst="roundRect">
             <a:avLst>
@@ -5568,12 +5795,10 @@
             </a:avLst>
           </a:prstGeom>
           <a:solidFill>
-            <a:srgbClr val="F7D4ED"/>
+            <a:srgbClr val="FAD1EE"/>
           </a:solidFill>
           <a:ln w="19050">
-            <a:solidFill>
-              <a:srgbClr val="D345A9"/>
-            </a:solidFill>
+            <a:noFill/>
             <a:prstDash val="dash"/>
           </a:ln>
         </p:spPr>
@@ -5591,7 +5816,7 @@
             <a:r>
               <a:rPr sz="1200" b="0" i="0">
                 <a:solidFill>
-                  <a:srgbClr val="721D59"/>
+                  <a:srgbClr val="8E8780"/>
                 </a:solidFill>
               </a:rPr>
               <a:t>사진 5</a:t>
@@ -5601,14 +5826,14 @@
       </p:sp>
       <p:sp>
         <p:nvSpPr>
-          <p:cNvPr id="10" name="사진 자리"/>
+          <p:cNvPr id="11" name="사진 자리"/>
           <p:cNvSpPr/>
           <p:nvPr/>
         </p:nvSpPr>
         <p:spPr>
           <a:xfrm>
-            <a:off x="3413683" y="3840480"/>
-            <a:ext cx="2590723" cy="2103120"/>
+            <a:off x="3413683" y="4160520"/>
+            <a:ext cx="2590723" cy="2194560"/>
           </a:xfrm>
           <a:prstGeom prst="roundRect">
             <a:avLst>
@@ -5616,12 +5841,10 @@
             </a:avLst>
           </a:prstGeom>
           <a:solidFill>
-            <a:srgbClr val="F7D4ED"/>
+            <a:srgbClr val="FAD1EE"/>
           </a:solidFill>
           <a:ln w="19050">
-            <a:solidFill>
-              <a:srgbClr val="D345A9"/>
-            </a:solidFill>
+            <a:noFill/>
             <a:prstDash val="dash"/>
           </a:ln>
         </p:spPr>
@@ -5639,7 +5862,7 @@
             <a:r>
               <a:rPr sz="1200" b="0" i="0">
                 <a:solidFill>
-                  <a:srgbClr val="721D59"/>
+                  <a:srgbClr val="8E8780"/>
                 </a:solidFill>
               </a:rPr>
               <a:t>사진 6</a:t>
@@ -5649,14 +5872,14 @@
       </p:sp>
       <p:sp>
         <p:nvSpPr>
-          <p:cNvPr id="11" name="사진 자리"/>
+          <p:cNvPr id="12" name="사진 자리"/>
           <p:cNvSpPr/>
           <p:nvPr/>
         </p:nvSpPr>
         <p:spPr>
           <a:xfrm>
-            <a:off x="6187287" y="3840480"/>
-            <a:ext cx="2590723" cy="2103120"/>
+            <a:off x="6187287" y="4160520"/>
+            <a:ext cx="2590723" cy="2194560"/>
           </a:xfrm>
           <a:prstGeom prst="roundRect">
             <a:avLst>
@@ -5664,12 +5887,10 @@
             </a:avLst>
           </a:prstGeom>
           <a:solidFill>
-            <a:srgbClr val="F7D4ED"/>
+            <a:srgbClr val="FAD1EE"/>
           </a:solidFill>
           <a:ln w="19050">
-            <a:solidFill>
-              <a:srgbClr val="D345A9"/>
-            </a:solidFill>
+            <a:noFill/>
             <a:prstDash val="dash"/>
           </a:ln>
         </p:spPr>
@@ -5687,7 +5908,7 @@
             <a:r>
               <a:rPr sz="1200" b="0" i="0">
                 <a:solidFill>
-                  <a:srgbClr val="721D59"/>
+                  <a:srgbClr val="8E8780"/>
                 </a:solidFill>
               </a:rPr>
               <a:t>사진 7</a:t>
@@ -5697,14 +5918,14 @@
       </p:sp>
       <p:sp>
         <p:nvSpPr>
-          <p:cNvPr id="12" name="사진 자리"/>
+          <p:cNvPr id="13" name="사진 자리"/>
           <p:cNvSpPr/>
           <p:nvPr/>
         </p:nvSpPr>
         <p:spPr>
           <a:xfrm>
-            <a:off x="8960891" y="3840480"/>
-            <a:ext cx="2590723" cy="2103120"/>
+            <a:off x="8960891" y="4160520"/>
+            <a:ext cx="2590723" cy="2194560"/>
           </a:xfrm>
           <a:prstGeom prst="roundRect">
             <a:avLst>
@@ -5712,12 +5933,10 @@
             </a:avLst>
           </a:prstGeom>
           <a:solidFill>
-            <a:srgbClr val="F7D4ED"/>
+            <a:srgbClr val="FAD1EE"/>
           </a:solidFill>
           <a:ln w="19050">
-            <a:solidFill>
-              <a:srgbClr val="D345A9"/>
-            </a:solidFill>
+            <a:noFill/>
             <a:prstDash val="dash"/>
           </a:ln>
         </p:spPr>
@@ -5735,7 +5954,7 @@
             <a:r>
               <a:rPr sz="1200" b="0" i="0">
                 <a:solidFill>
-                  <a:srgbClr val="721D59"/>
+                  <a:srgbClr val="8E8780"/>
                 </a:solidFill>
               </a:rPr>
               <a:t>사진 8</a:t>
@@ -5754,6 +5973,14 @@
 <file path=ppt/slides/slide6.xml><?xml version="1.0" encoding="utf-8"?>
 <p:sld xmlns:a="http://schemas.openxmlformats.org/drawingml/2006/main" xmlns:p="http://schemas.openxmlformats.org/presentationml/2006/main" xmlns:r="http://schemas.openxmlformats.org/officeDocument/2006/relationships">
   <p:cSld>
+    <p:bg>
+      <p:bgPr>
+        <a:solidFill>
+          <a:srgbClr val="FDEAF7"/>
+        </a:solidFill>
+        <a:effectLst/>
+      </p:bgPr>
+    </p:bg>
     <p:spTree>
       <p:nvGrpSpPr>
         <p:cNvPr id="1" name=""/>
@@ -5761,30 +5988,119 @@
         <p:nvPr/>
       </p:nvGrpSpPr>
       <p:grpSpPr/>
-      <p:pic>
-        <p:nvPicPr>
-          <p:cNvPr id="3" name="표지 그림" descr="birthday-07.jpg"/>
-          <p:cNvPicPr>
-            <a:picLocks noChangeAspect="1"/>
-          </p:cNvPicPr>
+      <p:sp>
+        <p:nvSpPr>
+          <p:cNvPr id="3" name="사진 자리"/>
+          <p:cNvSpPr/>
           <p:nvPr/>
-        </p:nvPicPr>
-        <p:blipFill>
-          <a:blip r:embed="rId2"/>
-          <a:stretch>
-            <a:fillRect/>
-          </a:stretch>
-        </p:blipFill>
-        <p:spPr>
-          <a:xfrm>
-            <a:off x="0" y="0"/>
-            <a:ext cx="12191695" cy="6858000"/>
+        </p:nvSpPr>
+        <p:spPr>
+          <a:xfrm>
+            <a:off x="7558851" y="685800"/>
+            <a:ext cx="3169840" cy="5486400"/>
+          </a:xfrm>
+          <a:prstGeom prst="round2SameRect">
+            <a:avLst>
+              <a:gd name="adj1" fmla="val 50000"/>
+              <a:gd name="adj2" fmla="val 0"/>
+            </a:avLst>
+          </a:prstGeom>
+          <a:solidFill>
+            <a:srgbClr val="F2A6DB"/>
+          </a:solidFill>
+          <a:ln>
+            <a:noFill/>
+          </a:ln>
+        </p:spPr>
+        <p:txBody>
+          <a:bodyPr rtlCol="0" anchor="ctr" wrap="square" lIns="54864" rIns="54864" tIns="27432" bIns="27432">
+            <a:noAutofit/>
+          </a:bodyPr>
+          <a:lstStyle/>
+          <a:p>
+            <a:pPr algn="ctr">
+              <a:lnSpc>
+                <a:spcPct val="100000"/>
+              </a:lnSpc>
+            </a:pPr>
+            <a:r>
+              <a:rPr sz="1400" b="0" i="0">
+                <a:solidFill>
+                  <a:srgbClr val="49273F"/>
+                </a:solidFill>
+              </a:rPr>
+              <a:t>사진을 넣어 주세요</a:t>
+            </a:r>
+          </a:p>
+        </p:txBody>
+      </p:sp>
+      <p:sp>
+        <p:nvSpPr>
+          <p:cNvPr id="4" name="장식"/>
+          <p:cNvSpPr/>
+          <p:nvPr/>
+        </p:nvSpPr>
+        <p:spPr>
+          <a:xfrm>
+            <a:off x="6827349" y="4251960"/>
+            <a:ext cx="1005840" cy="1005840"/>
+          </a:xfrm>
+          <a:prstGeom prst="ellipse">
+            <a:avLst/>
+          </a:prstGeom>
+          <a:solidFill>
+            <a:srgbClr val="F2A6DB"/>
+          </a:solidFill>
+          <a:ln>
+            <a:noFill/>
+          </a:ln>
+        </p:spPr>
+        <p:txBody>
+          <a:bodyPr rtlCol="0" anchor="ctr"/>
+          <a:lstStyle/>
+          <a:p>
+            <a:pPr algn="ctr"/>
+          </a:p>
+        </p:txBody>
+      </p:sp>
+      <p:sp>
+        <p:nvSpPr>
+          <p:cNvPr id="5" name="라벨"/>
+          <p:cNvSpPr txBox="1"/>
+          <p:nvPr/>
+        </p:nvSpPr>
+        <p:spPr>
+          <a:xfrm>
+            <a:off x="822960" y="2148840"/>
+            <a:ext cx="5608179" cy="274320"/>
           </a:xfrm>
           <a:prstGeom prst="rect">
             <a:avLst/>
           </a:prstGeom>
-        </p:spPr>
-      </p:pic>
+          <a:noFill/>
+        </p:spPr>
+        <p:txBody>
+          <a:bodyPr wrap="square" lIns="54864" rIns="54864" tIns="27432" bIns="27432" anchor="t">
+            <a:noAutofit/>
+          </a:bodyPr>
+          <a:lstStyle/>
+          <a:p>
+            <a:pPr algn="l">
+              <a:lnSpc>
+                <a:spcPct val="115000"/>
+              </a:lnSpc>
+            </a:pPr>
+            <a:r>
+              <a:rPr sz="1000" b="1" i="0" spc="250">
+                <a:solidFill>
+                  <a:srgbClr val="26231F"/>
+                </a:solidFill>
+              </a:rPr>
+              <a:t>FIRST BIRTHDAY</a:t>
+            </a:r>
+          </a:p>
+        </p:txBody>
+      </p:sp>
       <p:sp>
         <p:nvSpPr>
           <p:cNvPr id="2" name="Title 1"/>
@@ -5797,8 +6113,8 @@
         </p:nvSpPr>
         <p:spPr>
           <a:xfrm>
-            <a:off x="853418" y="2057400"/>
-            <a:ext cx="6095847" cy="1554480"/>
+            <a:off x="822960" y="2606040"/>
+            <a:ext cx="5608179" cy="1188720"/>
           </a:xfrm>
         </p:spPr>
         <p:txBody>
@@ -5815,7 +6131,7 @@
             <a:r>
               <a:rPr sz="3400" b="1" i="0">
                 <a:solidFill>
-                  <a:srgbClr val="721D59"/>
+                  <a:srgbClr val="26231F"/>
                 </a:solidFill>
               </a:rPr>
               <a:t>와 주셔서 고맙습니다</a:t>
@@ -5825,14 +6141,14 @@
       </p:sp>
       <p:sp>
         <p:nvSpPr>
-          <p:cNvPr id="4" name="한 줄 문구"/>
+          <p:cNvPr id="6" name="한 줄 문구"/>
           <p:cNvSpPr txBox="1"/>
           <p:nvPr/>
         </p:nvSpPr>
         <p:spPr>
           <a:xfrm>
-            <a:off x="853418" y="3749039"/>
-            <a:ext cx="6095847" cy="822960"/>
+            <a:off x="822960" y="3886200"/>
+            <a:ext cx="5608179" cy="822960"/>
           </a:xfrm>
           <a:prstGeom prst="rect">
             <a:avLst/>
@@ -5851,9 +6167,9 @@
               </a:lnSpc>
             </a:pPr>
             <a:r>
-              <a:rPr sz="1700" b="0" i="1">
-                <a:solidFill>
-                  <a:srgbClr val="721D59"/>
+              <a:rPr sz="1700" b="0" i="0">
+                <a:solidFill>
+                  <a:srgbClr val="26231F"/>
                 </a:solidFill>
               </a:rPr>
               <a:t>아이가 한 살이 되었습니다</a:t>
@@ -5863,14 +6179,14 @@
       </p:sp>
       <p:sp>
         <p:nvSpPr>
-          <p:cNvPr id="5" name="안내 문구"/>
+          <p:cNvPr id="7" name="안내 문구"/>
           <p:cNvSpPr txBox="1"/>
           <p:nvPr/>
         </p:nvSpPr>
         <p:spPr>
           <a:xfrm>
-            <a:off x="853418" y="4617720"/>
-            <a:ext cx="6095847" cy="914400"/>
+            <a:off x="822960" y="4754880"/>
+            <a:ext cx="5608179" cy="914400"/>
           </a:xfrm>
           <a:prstGeom prst="rect">
             <a:avLst/>
@@ -5891,7 +6207,7 @@
             <a:r>
               <a:rPr sz="1400" b="0" i="0">
                 <a:solidFill>
-                  <a:srgbClr val="666666"/>
+                  <a:srgbClr val="26231F"/>
                 </a:solidFill>
               </a:rPr>
               <a:t>아기 이름 · 부모 이름</a:t>
@@ -5918,34 +6234,34 @@
         <a:sysClr val="window" lastClr="FFFFFF"/>
       </a:lt1>
       <a:dk2>
-        <a:srgbClr val="721D59"/>
+        <a:srgbClr val="49273F"/>
       </a:dk2>
       <a:lt2>
-        <a:srgbClr val="FCF3F9"/>
+        <a:srgbClr val="FDEAF7"/>
       </a:lt2>
       <a:accent1>
-        <a:srgbClr val="D345A9"/>
+        <a:srgbClr val="ED97D3"/>
       </a:accent1>
       <a:accent2>
-        <a:srgbClr val="339941"/>
+        <a:srgbClr val="F3BAC7"/>
       </a:accent2>
       <a:accent3>
-        <a:srgbClr val="721D59"/>
+        <a:srgbClr val="49273F"/>
       </a:accent3>
       <a:accent4>
-        <a:srgbClr val="F7D4ED"/>
+        <a:srgbClr val="FAD1EE"/>
       </a:accent4>
       <a:accent5>
-        <a:srgbClr val="836F75"/>
+        <a:srgbClr val="F0A8CD"/>
       </a:accent5>
       <a:accent6>
-        <a:srgbClr val="AA779B"/>
+        <a:srgbClr val="927D8C"/>
       </a:accent6>
       <a:hlink>
-        <a:srgbClr val="D345A9"/>
+        <a:srgbClr val="ED97D3"/>
       </a:hlink>
       <a:folHlink>
-        <a:srgbClr val="721D59"/>
+        <a:srgbClr val="49273F"/>
       </a:folHlink>
     </a:clrScheme>
     <a:fontScheme name="Office">
